--- a/assets/device_icons.pptx
+++ b/assets/device_icons.pptx
@@ -274,7 +274,7 @@
           <a:p>
             <a:fld id="{30D63992-91CA-41F7-A16C-71C1C327BEB8}" type="datetimeFigureOut">
               <a:rPr kumimoji="1" lang="ja-JP" altLang="en-US" smtClean="0"/>
-              <a:t>2025/4/4</a:t>
+              <a:t>2026/6/2</a:t>
             </a:fld>
             <a:endParaRPr kumimoji="1" lang="ja-JP" altLang="en-US"/>
           </a:p>
@@ -504,7 +504,7 @@
           <a:p>
             <a:fld id="{30D63992-91CA-41F7-A16C-71C1C327BEB8}" type="datetimeFigureOut">
               <a:rPr kumimoji="1" lang="ja-JP" altLang="en-US" smtClean="0"/>
-              <a:t>2025/4/4</a:t>
+              <a:t>2026/6/2</a:t>
             </a:fld>
             <a:endParaRPr kumimoji="1" lang="ja-JP" altLang="en-US"/>
           </a:p>
@@ -744,7 +744,7 @@
           <a:p>
             <a:fld id="{30D63992-91CA-41F7-A16C-71C1C327BEB8}" type="datetimeFigureOut">
               <a:rPr kumimoji="1" lang="ja-JP" altLang="en-US" smtClean="0"/>
-              <a:t>2025/4/4</a:t>
+              <a:t>2026/6/2</a:t>
             </a:fld>
             <a:endParaRPr kumimoji="1" lang="ja-JP" altLang="en-US"/>
           </a:p>
@@ -974,7 +974,7 @@
           <a:p>
             <a:fld id="{30D63992-91CA-41F7-A16C-71C1C327BEB8}" type="datetimeFigureOut">
               <a:rPr kumimoji="1" lang="ja-JP" altLang="en-US" smtClean="0"/>
-              <a:t>2025/4/4</a:t>
+              <a:t>2026/6/2</a:t>
             </a:fld>
             <a:endParaRPr kumimoji="1" lang="ja-JP" altLang="en-US"/>
           </a:p>
@@ -1249,7 +1249,7 @@
           <a:p>
             <a:fld id="{30D63992-91CA-41F7-A16C-71C1C327BEB8}" type="datetimeFigureOut">
               <a:rPr kumimoji="1" lang="ja-JP" altLang="en-US" smtClean="0"/>
-              <a:t>2025/4/4</a:t>
+              <a:t>2026/6/2</a:t>
             </a:fld>
             <a:endParaRPr kumimoji="1" lang="ja-JP" altLang="en-US"/>
           </a:p>
@@ -1578,7 +1578,7 @@
           <a:p>
             <a:fld id="{30D63992-91CA-41F7-A16C-71C1C327BEB8}" type="datetimeFigureOut">
               <a:rPr kumimoji="1" lang="ja-JP" altLang="en-US" smtClean="0"/>
-              <a:t>2025/4/4</a:t>
+              <a:t>2026/6/2</a:t>
             </a:fld>
             <a:endParaRPr kumimoji="1" lang="ja-JP" altLang="en-US"/>
           </a:p>
@@ -2054,7 +2054,7 @@
           <a:p>
             <a:fld id="{30D63992-91CA-41F7-A16C-71C1C327BEB8}" type="datetimeFigureOut">
               <a:rPr kumimoji="1" lang="ja-JP" altLang="en-US" smtClean="0"/>
-              <a:t>2025/4/4</a:t>
+              <a:t>2026/6/2</a:t>
             </a:fld>
             <a:endParaRPr kumimoji="1" lang="ja-JP" altLang="en-US"/>
           </a:p>
@@ -2195,7 +2195,7 @@
           <a:p>
             <a:fld id="{30D63992-91CA-41F7-A16C-71C1C327BEB8}" type="datetimeFigureOut">
               <a:rPr kumimoji="1" lang="ja-JP" altLang="en-US" smtClean="0"/>
-              <a:t>2025/4/4</a:t>
+              <a:t>2026/6/2</a:t>
             </a:fld>
             <a:endParaRPr kumimoji="1" lang="ja-JP" altLang="en-US"/>
           </a:p>
@@ -2308,7 +2308,7 @@
           <a:p>
             <a:fld id="{30D63992-91CA-41F7-A16C-71C1C327BEB8}" type="datetimeFigureOut">
               <a:rPr kumimoji="1" lang="ja-JP" altLang="en-US" smtClean="0"/>
-              <a:t>2025/4/4</a:t>
+              <a:t>2026/6/2</a:t>
             </a:fld>
             <a:endParaRPr kumimoji="1" lang="ja-JP" altLang="en-US"/>
           </a:p>
@@ -2651,7 +2651,7 @@
           <a:p>
             <a:fld id="{30D63992-91CA-41F7-A16C-71C1C327BEB8}" type="datetimeFigureOut">
               <a:rPr kumimoji="1" lang="ja-JP" altLang="en-US" smtClean="0"/>
-              <a:t>2025/4/4</a:t>
+              <a:t>2026/6/2</a:t>
             </a:fld>
             <a:endParaRPr kumimoji="1" lang="ja-JP" altLang="en-US"/>
           </a:p>
@@ -2939,7 +2939,7 @@
           <a:p>
             <a:fld id="{30D63992-91CA-41F7-A16C-71C1C327BEB8}" type="datetimeFigureOut">
               <a:rPr kumimoji="1" lang="ja-JP" altLang="en-US" smtClean="0"/>
-              <a:t>2025/4/4</a:t>
+              <a:t>2026/6/2</a:t>
             </a:fld>
             <a:endParaRPr kumimoji="1" lang="ja-JP" altLang="en-US"/>
           </a:p>
@@ -3212,7 +3212,7 @@
           <a:p>
             <a:fld id="{30D63992-91CA-41F7-A16C-71C1C327BEB8}" type="datetimeFigureOut">
               <a:rPr kumimoji="1" lang="ja-JP" altLang="en-US" smtClean="0"/>
-              <a:t>2025/4/4</a:t>
+              <a:t>2026/6/2</a:t>
             </a:fld>
             <a:endParaRPr kumimoji="1" lang="ja-JP" altLang="en-US"/>
           </a:p>
@@ -13249,6 +13249,1289 @@
           </p:txBody>
         </p:sp>
       </p:grpSp>
+      <p:grpSp>
+        <p:nvGrpSpPr>
+          <p:cNvPr id="129" name="グループ化 128">
+            <a:extLst>
+              <a:ext uri="{FF2B5EF4-FFF2-40B4-BE49-F238E27FC236}">
+                <a16:creationId xmlns:a16="http://schemas.microsoft.com/office/drawing/2014/main" id="{6B81E922-4645-DF04-0CE2-17830279DAD3}"/>
+              </a:ext>
+            </a:extLst>
+          </p:cNvPr>
+          <p:cNvGrpSpPr/>
+          <p:nvPr/>
+        </p:nvGrpSpPr>
+        <p:grpSpPr>
+          <a:xfrm>
+            <a:off x="6052194" y="306737"/>
+            <a:ext cx="1914773" cy="2624662"/>
+            <a:chOff x="6052194" y="306737"/>
+            <a:chExt cx="1914773" cy="2624662"/>
+          </a:xfrm>
+        </p:grpSpPr>
+        <p:sp>
+          <p:nvSpPr>
+            <p:cNvPr id="7" name="四角形: 角を丸くする 6">
+              <a:extLst>
+                <a:ext uri="{FF2B5EF4-FFF2-40B4-BE49-F238E27FC236}">
+                  <a16:creationId xmlns:a16="http://schemas.microsoft.com/office/drawing/2014/main" id="{61FDB73D-119C-BD64-CF7B-A3DA8CE82270}"/>
+                </a:ext>
+              </a:extLst>
+            </p:cNvPr>
+            <p:cNvSpPr/>
+            <p:nvPr/>
+          </p:nvSpPr>
+          <p:spPr>
+            <a:xfrm>
+              <a:off x="6052194" y="306737"/>
+              <a:ext cx="1914773" cy="2586999"/>
+            </a:xfrm>
+            <a:prstGeom prst="roundRect">
+              <a:avLst>
+                <a:gd name="adj" fmla="val 5124"/>
+              </a:avLst>
+            </a:prstGeom>
+            <a:solidFill>
+              <a:srgbClr val="B00000"/>
+            </a:solidFill>
+            <a:ln w="19050">
+              <a:solidFill>
+                <a:schemeClr val="accent2">
+                  <a:lumMod val="75000"/>
+                </a:schemeClr>
+              </a:solidFill>
+            </a:ln>
+          </p:spPr>
+          <p:style>
+            <a:lnRef idx="2">
+              <a:schemeClr val="accent1">
+                <a:shade val="50000"/>
+              </a:schemeClr>
+            </a:lnRef>
+            <a:fillRef idx="1">
+              <a:schemeClr val="accent1"/>
+            </a:fillRef>
+            <a:effectRef idx="0">
+              <a:schemeClr val="accent1"/>
+            </a:effectRef>
+            <a:fontRef idx="minor">
+              <a:schemeClr val="lt1"/>
+            </a:fontRef>
+          </p:style>
+          <p:txBody>
+            <a:bodyPr rtlCol="0" anchor="ctr"/>
+            <a:lstStyle/>
+            <a:p>
+              <a:pPr algn="ctr"/>
+              <a:endParaRPr kumimoji="1" lang="ja-JP" altLang="en-US"/>
+            </a:p>
+          </p:txBody>
+        </p:sp>
+        <p:sp>
+          <p:nvSpPr>
+            <p:cNvPr id="15" name="正方形/長方形 14">
+              <a:extLst>
+                <a:ext uri="{FF2B5EF4-FFF2-40B4-BE49-F238E27FC236}">
+                  <a16:creationId xmlns:a16="http://schemas.microsoft.com/office/drawing/2014/main" id="{915991AC-D58A-9B72-BDCF-4C28F2BD12F4}"/>
+                </a:ext>
+              </a:extLst>
+            </p:cNvPr>
+            <p:cNvSpPr/>
+            <p:nvPr/>
+          </p:nvSpPr>
+          <p:spPr>
+            <a:xfrm>
+              <a:off x="6529057" y="1193888"/>
+              <a:ext cx="958941" cy="958941"/>
+            </a:xfrm>
+            <a:prstGeom prst="rect">
+              <a:avLst/>
+            </a:prstGeom>
+            <a:solidFill>
+              <a:schemeClr val="bg1">
+                <a:lumMod val="65000"/>
+              </a:schemeClr>
+            </a:solidFill>
+            <a:ln>
+              <a:noFill/>
+            </a:ln>
+          </p:spPr>
+          <p:style>
+            <a:lnRef idx="2">
+              <a:schemeClr val="accent1">
+                <a:shade val="50000"/>
+              </a:schemeClr>
+            </a:lnRef>
+            <a:fillRef idx="1">
+              <a:schemeClr val="accent1"/>
+            </a:fillRef>
+            <a:effectRef idx="0">
+              <a:schemeClr val="accent1"/>
+            </a:effectRef>
+            <a:fontRef idx="minor">
+              <a:schemeClr val="lt1"/>
+            </a:fontRef>
+          </p:style>
+          <p:txBody>
+            <a:bodyPr rtlCol="0" anchor="ctr"/>
+            <a:lstStyle/>
+            <a:p>
+              <a:pPr algn="ctr"/>
+              <a:endParaRPr kumimoji="1" lang="ja-JP" altLang="en-US"/>
+            </a:p>
+          </p:txBody>
+        </p:sp>
+        <p:sp>
+          <p:nvSpPr>
+            <p:cNvPr id="16" name="正方形/長方形 15">
+              <a:extLst>
+                <a:ext uri="{FF2B5EF4-FFF2-40B4-BE49-F238E27FC236}">
+                  <a16:creationId xmlns:a16="http://schemas.microsoft.com/office/drawing/2014/main" id="{16C391B0-B484-0C9A-4A80-662928FD88A3}"/>
+                </a:ext>
+              </a:extLst>
+            </p:cNvPr>
+            <p:cNvSpPr/>
+            <p:nvPr/>
+          </p:nvSpPr>
+          <p:spPr>
+            <a:xfrm>
+              <a:off x="6867110" y="2672013"/>
+              <a:ext cx="284939" cy="259386"/>
+            </a:xfrm>
+            <a:prstGeom prst="rect">
+              <a:avLst/>
+            </a:prstGeom>
+            <a:solidFill>
+              <a:schemeClr val="bg1">
+                <a:lumMod val="65000"/>
+              </a:schemeClr>
+            </a:solidFill>
+            <a:ln>
+              <a:noFill/>
+            </a:ln>
+          </p:spPr>
+          <p:style>
+            <a:lnRef idx="2">
+              <a:schemeClr val="accent1">
+                <a:shade val="50000"/>
+              </a:schemeClr>
+            </a:lnRef>
+            <a:fillRef idx="1">
+              <a:schemeClr val="accent1"/>
+            </a:fillRef>
+            <a:effectRef idx="0">
+              <a:schemeClr val="accent1"/>
+            </a:effectRef>
+            <a:fontRef idx="minor">
+              <a:schemeClr val="lt1"/>
+            </a:fontRef>
+          </p:style>
+          <p:txBody>
+            <a:bodyPr rtlCol="0" anchor="ctr"/>
+            <a:lstStyle/>
+            <a:p>
+              <a:pPr algn="ctr"/>
+              <a:endParaRPr kumimoji="1" lang="ja-JP" altLang="en-US"/>
+            </a:p>
+          </p:txBody>
+        </p:sp>
+        <p:sp>
+          <p:nvSpPr>
+            <p:cNvPr id="18" name="正方形/長方形 17">
+              <a:extLst>
+                <a:ext uri="{FF2B5EF4-FFF2-40B4-BE49-F238E27FC236}">
+                  <a16:creationId xmlns:a16="http://schemas.microsoft.com/office/drawing/2014/main" id="{2F861637-A696-6A34-50CD-5BE7C18B8922}"/>
+                </a:ext>
+              </a:extLst>
+            </p:cNvPr>
+            <p:cNvSpPr/>
+            <p:nvPr/>
+          </p:nvSpPr>
+          <p:spPr>
+            <a:xfrm>
+              <a:off x="7336278" y="2707355"/>
+              <a:ext cx="106700" cy="138212"/>
+            </a:xfrm>
+            <a:prstGeom prst="rect">
+              <a:avLst/>
+            </a:prstGeom>
+            <a:solidFill>
+              <a:schemeClr val="accent4">
+                <a:lumMod val="20000"/>
+                <a:lumOff val="80000"/>
+              </a:schemeClr>
+            </a:solidFill>
+            <a:ln>
+              <a:noFill/>
+            </a:ln>
+          </p:spPr>
+          <p:style>
+            <a:lnRef idx="2">
+              <a:schemeClr val="accent1">
+                <a:shade val="50000"/>
+              </a:schemeClr>
+            </a:lnRef>
+            <a:fillRef idx="1">
+              <a:schemeClr val="accent1"/>
+            </a:fillRef>
+            <a:effectRef idx="0">
+              <a:schemeClr val="accent1"/>
+            </a:effectRef>
+            <a:fontRef idx="minor">
+              <a:schemeClr val="lt1"/>
+            </a:fontRef>
+          </p:style>
+          <p:txBody>
+            <a:bodyPr rtlCol="0" anchor="ctr"/>
+            <a:lstStyle/>
+            <a:p>
+              <a:pPr algn="ctr"/>
+              <a:endParaRPr kumimoji="1" lang="ja-JP" altLang="en-US"/>
+            </a:p>
+          </p:txBody>
+        </p:sp>
+        <p:sp>
+          <p:nvSpPr>
+            <p:cNvPr id="19" name="正方形/長方形 18">
+              <a:extLst>
+                <a:ext uri="{FF2B5EF4-FFF2-40B4-BE49-F238E27FC236}">
+                  <a16:creationId xmlns:a16="http://schemas.microsoft.com/office/drawing/2014/main" id="{7FD7EA87-606C-A3E8-1C64-6739C83D83DF}"/>
+                </a:ext>
+              </a:extLst>
+            </p:cNvPr>
+            <p:cNvSpPr/>
+            <p:nvPr/>
+          </p:nvSpPr>
+          <p:spPr>
+            <a:xfrm>
+              <a:off x="7506158" y="2707355"/>
+              <a:ext cx="106700" cy="138212"/>
+            </a:xfrm>
+            <a:prstGeom prst="rect">
+              <a:avLst/>
+            </a:prstGeom>
+            <a:solidFill>
+              <a:schemeClr val="accent4">
+                <a:lumMod val="20000"/>
+                <a:lumOff val="80000"/>
+              </a:schemeClr>
+            </a:solidFill>
+            <a:ln>
+              <a:noFill/>
+            </a:ln>
+          </p:spPr>
+          <p:style>
+            <a:lnRef idx="2">
+              <a:schemeClr val="accent1">
+                <a:shade val="50000"/>
+              </a:schemeClr>
+            </a:lnRef>
+            <a:fillRef idx="1">
+              <a:schemeClr val="accent1"/>
+            </a:fillRef>
+            <a:effectRef idx="0">
+              <a:schemeClr val="accent1"/>
+            </a:effectRef>
+            <a:fontRef idx="minor">
+              <a:schemeClr val="lt1"/>
+            </a:fontRef>
+          </p:style>
+          <p:txBody>
+            <a:bodyPr rtlCol="0" anchor="ctr"/>
+            <a:lstStyle/>
+            <a:p>
+              <a:pPr algn="ctr"/>
+              <a:endParaRPr kumimoji="1" lang="ja-JP" altLang="en-US"/>
+            </a:p>
+          </p:txBody>
+        </p:sp>
+        <p:sp>
+          <p:nvSpPr>
+            <p:cNvPr id="26" name="正方形/長方形 25">
+              <a:extLst>
+                <a:ext uri="{FF2B5EF4-FFF2-40B4-BE49-F238E27FC236}">
+                  <a16:creationId xmlns:a16="http://schemas.microsoft.com/office/drawing/2014/main" id="{A9E87AAB-3EF9-A9CA-E1A2-D31C28C14F99}"/>
+                </a:ext>
+              </a:extLst>
+            </p:cNvPr>
+            <p:cNvSpPr/>
+            <p:nvPr/>
+          </p:nvSpPr>
+          <p:spPr>
+            <a:xfrm>
+              <a:off x="6672904" y="2349502"/>
+              <a:ext cx="169441" cy="161179"/>
+            </a:xfrm>
+            <a:prstGeom prst="rect">
+              <a:avLst/>
+            </a:prstGeom>
+            <a:solidFill>
+              <a:schemeClr val="tx1">
+                <a:lumMod val="75000"/>
+                <a:lumOff val="25000"/>
+              </a:schemeClr>
+            </a:solidFill>
+            <a:ln>
+              <a:noFill/>
+            </a:ln>
+          </p:spPr>
+          <p:style>
+            <a:lnRef idx="2">
+              <a:schemeClr val="accent1">
+                <a:shade val="50000"/>
+              </a:schemeClr>
+            </a:lnRef>
+            <a:fillRef idx="1">
+              <a:schemeClr val="accent1"/>
+            </a:fillRef>
+            <a:effectRef idx="0">
+              <a:schemeClr val="accent1"/>
+            </a:effectRef>
+            <a:fontRef idx="minor">
+              <a:schemeClr val="lt1"/>
+            </a:fontRef>
+          </p:style>
+          <p:txBody>
+            <a:bodyPr rtlCol="0" anchor="ctr"/>
+            <a:lstStyle/>
+            <a:p>
+              <a:pPr algn="ctr"/>
+              <a:endParaRPr kumimoji="1" lang="ja-JP" altLang="en-US"/>
+            </a:p>
+          </p:txBody>
+        </p:sp>
+        <p:sp>
+          <p:nvSpPr>
+            <p:cNvPr id="34" name="楕円 33">
+              <a:extLst>
+                <a:ext uri="{FF2B5EF4-FFF2-40B4-BE49-F238E27FC236}">
+                  <a16:creationId xmlns:a16="http://schemas.microsoft.com/office/drawing/2014/main" id="{70B8AE31-78DB-24B9-975B-BF39BB1AAECB}"/>
+                </a:ext>
+              </a:extLst>
+            </p:cNvPr>
+            <p:cNvSpPr/>
+            <p:nvPr/>
+          </p:nvSpPr>
+          <p:spPr>
+            <a:xfrm>
+              <a:off x="7712492" y="864082"/>
+              <a:ext cx="198198" cy="198198"/>
+            </a:xfrm>
+            <a:prstGeom prst="ellipse">
+              <a:avLst/>
+            </a:prstGeom>
+            <a:solidFill>
+              <a:schemeClr val="bg1"/>
+            </a:solidFill>
+            <a:ln>
+              <a:noFill/>
+            </a:ln>
+          </p:spPr>
+          <p:style>
+            <a:lnRef idx="2">
+              <a:schemeClr val="accent1">
+                <a:shade val="50000"/>
+              </a:schemeClr>
+            </a:lnRef>
+            <a:fillRef idx="1">
+              <a:schemeClr val="accent1"/>
+            </a:fillRef>
+            <a:effectRef idx="0">
+              <a:schemeClr val="accent1"/>
+            </a:effectRef>
+            <a:fontRef idx="minor">
+              <a:schemeClr val="lt1"/>
+            </a:fontRef>
+          </p:style>
+          <p:txBody>
+            <a:bodyPr rtlCol="0" anchor="ctr"/>
+            <a:lstStyle/>
+            <a:p>
+              <a:pPr algn="ctr"/>
+              <a:endParaRPr kumimoji="1" lang="ja-JP" altLang="en-US"/>
+            </a:p>
+          </p:txBody>
+        </p:sp>
+        <p:sp>
+          <p:nvSpPr>
+            <p:cNvPr id="35" name="楕円 34">
+              <a:extLst>
+                <a:ext uri="{FF2B5EF4-FFF2-40B4-BE49-F238E27FC236}">
+                  <a16:creationId xmlns:a16="http://schemas.microsoft.com/office/drawing/2014/main" id="{9B76C7DA-5E11-6F71-0F33-EF24B9DAC5B8}"/>
+                </a:ext>
+              </a:extLst>
+            </p:cNvPr>
+            <p:cNvSpPr/>
+            <p:nvPr/>
+          </p:nvSpPr>
+          <p:spPr>
+            <a:xfrm>
+              <a:off x="7712492" y="2653302"/>
+              <a:ext cx="198198" cy="198198"/>
+            </a:xfrm>
+            <a:prstGeom prst="ellipse">
+              <a:avLst/>
+            </a:prstGeom>
+            <a:solidFill>
+              <a:schemeClr val="bg1"/>
+            </a:solidFill>
+            <a:ln>
+              <a:noFill/>
+            </a:ln>
+          </p:spPr>
+          <p:style>
+            <a:lnRef idx="2">
+              <a:schemeClr val="accent1">
+                <a:shade val="50000"/>
+              </a:schemeClr>
+            </a:lnRef>
+            <a:fillRef idx="1">
+              <a:schemeClr val="accent1"/>
+            </a:fillRef>
+            <a:effectRef idx="0">
+              <a:schemeClr val="accent1"/>
+            </a:effectRef>
+            <a:fontRef idx="minor">
+              <a:schemeClr val="lt1"/>
+            </a:fontRef>
+          </p:style>
+          <p:txBody>
+            <a:bodyPr rtlCol="0" anchor="ctr"/>
+            <a:lstStyle/>
+            <a:p>
+              <a:pPr algn="ctr"/>
+              <a:endParaRPr kumimoji="1" lang="ja-JP" altLang="en-US"/>
+            </a:p>
+          </p:txBody>
+        </p:sp>
+        <p:sp>
+          <p:nvSpPr>
+            <p:cNvPr id="36" name="楕円 35">
+              <a:extLst>
+                <a:ext uri="{FF2B5EF4-FFF2-40B4-BE49-F238E27FC236}">
+                  <a16:creationId xmlns:a16="http://schemas.microsoft.com/office/drawing/2014/main" id="{357F31E8-DF43-EC26-DAD8-F4C4107793A4}"/>
+                </a:ext>
+              </a:extLst>
+            </p:cNvPr>
+            <p:cNvSpPr/>
+            <p:nvPr/>
+          </p:nvSpPr>
+          <p:spPr>
+            <a:xfrm>
+              <a:off x="6106365" y="2653302"/>
+              <a:ext cx="198198" cy="198198"/>
+            </a:xfrm>
+            <a:prstGeom prst="ellipse">
+              <a:avLst/>
+            </a:prstGeom>
+            <a:solidFill>
+              <a:schemeClr val="bg1"/>
+            </a:solidFill>
+            <a:ln>
+              <a:noFill/>
+            </a:ln>
+          </p:spPr>
+          <p:style>
+            <a:lnRef idx="2">
+              <a:schemeClr val="accent1">
+                <a:shade val="50000"/>
+              </a:schemeClr>
+            </a:lnRef>
+            <a:fillRef idx="1">
+              <a:schemeClr val="accent1"/>
+            </a:fillRef>
+            <a:effectRef idx="0">
+              <a:schemeClr val="accent1"/>
+            </a:effectRef>
+            <a:fontRef idx="minor">
+              <a:schemeClr val="lt1"/>
+            </a:fontRef>
+          </p:style>
+          <p:txBody>
+            <a:bodyPr rtlCol="0" anchor="ctr"/>
+            <a:lstStyle/>
+            <a:p>
+              <a:pPr algn="ctr"/>
+              <a:endParaRPr kumimoji="1" lang="ja-JP" altLang="en-US"/>
+            </a:p>
+          </p:txBody>
+        </p:sp>
+        <p:sp>
+          <p:nvSpPr>
+            <p:cNvPr id="37" name="楕円 36">
+              <a:extLst>
+                <a:ext uri="{FF2B5EF4-FFF2-40B4-BE49-F238E27FC236}">
+                  <a16:creationId xmlns:a16="http://schemas.microsoft.com/office/drawing/2014/main" id="{04E375DE-1172-B57A-E006-9BF5832EA4E0}"/>
+                </a:ext>
+              </a:extLst>
+            </p:cNvPr>
+            <p:cNvSpPr/>
+            <p:nvPr/>
+          </p:nvSpPr>
+          <p:spPr>
+            <a:xfrm>
+              <a:off x="6106365" y="864082"/>
+              <a:ext cx="198198" cy="198198"/>
+            </a:xfrm>
+            <a:prstGeom prst="ellipse">
+              <a:avLst/>
+            </a:prstGeom>
+            <a:solidFill>
+              <a:schemeClr val="bg1"/>
+            </a:solidFill>
+            <a:ln>
+              <a:noFill/>
+            </a:ln>
+          </p:spPr>
+          <p:style>
+            <a:lnRef idx="2">
+              <a:schemeClr val="accent1">
+                <a:shade val="50000"/>
+              </a:schemeClr>
+            </a:lnRef>
+            <a:fillRef idx="1">
+              <a:schemeClr val="accent1"/>
+            </a:fillRef>
+            <a:effectRef idx="0">
+              <a:schemeClr val="accent1"/>
+            </a:effectRef>
+            <a:fontRef idx="minor">
+              <a:schemeClr val="lt1"/>
+            </a:fontRef>
+          </p:style>
+          <p:txBody>
+            <a:bodyPr rtlCol="0" anchor="ctr"/>
+            <a:lstStyle/>
+            <a:p>
+              <a:pPr algn="ctr"/>
+              <a:endParaRPr kumimoji="1" lang="ja-JP" altLang="en-US"/>
+            </a:p>
+          </p:txBody>
+        </p:sp>
+        <p:sp>
+          <p:nvSpPr>
+            <p:cNvPr id="45" name="正方形/長方形 44">
+              <a:extLst>
+                <a:ext uri="{FF2B5EF4-FFF2-40B4-BE49-F238E27FC236}">
+                  <a16:creationId xmlns:a16="http://schemas.microsoft.com/office/drawing/2014/main" id="{38849BBA-ED05-8D70-5E54-38BA1A610B2D}"/>
+                </a:ext>
+              </a:extLst>
+            </p:cNvPr>
+            <p:cNvSpPr/>
+            <p:nvPr/>
+          </p:nvSpPr>
+          <p:spPr>
+            <a:xfrm rot="5400000">
+              <a:off x="6022407" y="2210438"/>
+              <a:ext cx="443719" cy="296533"/>
+            </a:xfrm>
+            <a:prstGeom prst="rect">
+              <a:avLst/>
+            </a:prstGeom>
+            <a:solidFill>
+              <a:srgbClr val="D0BEA1"/>
+            </a:solidFill>
+            <a:ln>
+              <a:noFill/>
+            </a:ln>
+          </p:spPr>
+          <p:style>
+            <a:lnRef idx="2">
+              <a:schemeClr val="accent1">
+                <a:shade val="50000"/>
+              </a:schemeClr>
+            </a:lnRef>
+            <a:fillRef idx="1">
+              <a:schemeClr val="accent1"/>
+            </a:fillRef>
+            <a:effectRef idx="0">
+              <a:schemeClr val="accent1"/>
+            </a:effectRef>
+            <a:fontRef idx="minor">
+              <a:schemeClr val="lt1"/>
+            </a:fontRef>
+          </p:style>
+          <p:txBody>
+            <a:bodyPr rtlCol="0" anchor="ctr"/>
+            <a:lstStyle/>
+            <a:p>
+              <a:pPr algn="ctr"/>
+              <a:endParaRPr kumimoji="1" lang="ja-JP" altLang="en-US"/>
+            </a:p>
+          </p:txBody>
+        </p:sp>
+        <p:sp>
+          <p:nvSpPr>
+            <p:cNvPr id="49" name="テキスト ボックス 48">
+              <a:extLst>
+                <a:ext uri="{FF2B5EF4-FFF2-40B4-BE49-F238E27FC236}">
+                  <a16:creationId xmlns:a16="http://schemas.microsoft.com/office/drawing/2014/main" id="{CF4AFFDA-E9AB-E5AB-9B09-AF610FAF3171}"/>
+                </a:ext>
+              </a:extLst>
+            </p:cNvPr>
+            <p:cNvSpPr txBox="1"/>
+            <p:nvPr/>
+          </p:nvSpPr>
+          <p:spPr>
+            <a:xfrm>
+              <a:off x="6052194" y="1213515"/>
+              <a:ext cx="1914772" cy="923330"/>
+            </a:xfrm>
+            <a:prstGeom prst="rect">
+              <a:avLst/>
+            </a:prstGeom>
+            <a:noFill/>
+          </p:spPr>
+          <p:txBody>
+            <a:bodyPr wrap="square" rtlCol="0">
+              <a:spAutoFit/>
+            </a:bodyPr>
+            <a:lstStyle/>
+            <a:p>
+              <a:pPr algn="ctr"/>
+              <a:r>
+                <a:rPr kumimoji="1" lang="en-US" altLang="ja-JP" b="1">
+                  <a:solidFill>
+                    <a:schemeClr val="bg1"/>
+                  </a:solidFill>
+                  <a:latin typeface="Arial" panose="020B0604020202020204" pitchFamily="34" charset="0"/>
+                  <a:cs typeface="Arial" panose="020B0604020202020204" pitchFamily="34" charset="0"/>
+                </a:rPr>
+                <a:t>Wio</a:t>
+              </a:r>
+              <a:br>
+                <a:rPr kumimoji="1" lang="en-US" altLang="ja-JP" b="1">
+                  <a:solidFill>
+                    <a:schemeClr val="bg1"/>
+                  </a:solidFill>
+                  <a:latin typeface="Arial" panose="020B0604020202020204" pitchFamily="34" charset="0"/>
+                  <a:cs typeface="Arial" panose="020B0604020202020204" pitchFamily="34" charset="0"/>
+                </a:rPr>
+              </a:br>
+              <a:r>
+                <a:rPr kumimoji="1" lang="en-US" altLang="ja-JP" b="1">
+                  <a:solidFill>
+                    <a:schemeClr val="bg1"/>
+                  </a:solidFill>
+                  <a:latin typeface="Arial" panose="020B0604020202020204" pitchFamily="34" charset="0"/>
+                  <a:cs typeface="Arial" panose="020B0604020202020204" pitchFamily="34" charset="0"/>
+                </a:rPr>
+                <a:t>Tracker</a:t>
+              </a:r>
+              <a:br>
+                <a:rPr kumimoji="1" lang="en-US" altLang="ja-JP" b="1">
+                  <a:solidFill>
+                    <a:schemeClr val="bg1"/>
+                  </a:solidFill>
+                  <a:latin typeface="Arial" panose="020B0604020202020204" pitchFamily="34" charset="0"/>
+                  <a:cs typeface="Arial" panose="020B0604020202020204" pitchFamily="34" charset="0"/>
+                </a:rPr>
+              </a:br>
+              <a:r>
+                <a:rPr kumimoji="1" lang="en-US" altLang="ja-JP" b="1">
+                  <a:solidFill>
+                    <a:schemeClr val="bg1"/>
+                  </a:solidFill>
+                  <a:latin typeface="Arial" panose="020B0604020202020204" pitchFamily="34" charset="0"/>
+                  <a:cs typeface="Arial" panose="020B0604020202020204" pitchFamily="34" charset="0"/>
+                </a:rPr>
+                <a:t>1110</a:t>
+              </a:r>
+              <a:endParaRPr kumimoji="1" lang="ja-JP" altLang="en-US" b="1" dirty="0">
+                <a:solidFill>
+                  <a:schemeClr val="bg1"/>
+                </a:solidFill>
+                <a:latin typeface="Arial" panose="020B0604020202020204" pitchFamily="34" charset="0"/>
+                <a:cs typeface="Arial" panose="020B0604020202020204" pitchFamily="34" charset="0"/>
+              </a:endParaRPr>
+            </a:p>
+          </p:txBody>
+        </p:sp>
+        <p:sp>
+          <p:nvSpPr>
+            <p:cNvPr id="50" name="正方形/長方形 49">
+              <a:extLst>
+                <a:ext uri="{FF2B5EF4-FFF2-40B4-BE49-F238E27FC236}">
+                  <a16:creationId xmlns:a16="http://schemas.microsoft.com/office/drawing/2014/main" id="{B3A20AF7-9BFD-F93E-C545-D89A98F8F2D4}"/>
+                </a:ext>
+              </a:extLst>
+            </p:cNvPr>
+            <p:cNvSpPr/>
+            <p:nvPr/>
+          </p:nvSpPr>
+          <p:spPr>
+            <a:xfrm>
+              <a:off x="6534898" y="2611506"/>
+              <a:ext cx="246569" cy="258555"/>
+            </a:xfrm>
+            <a:prstGeom prst="rect">
+              <a:avLst/>
+            </a:prstGeom>
+            <a:solidFill>
+              <a:srgbClr val="D0BEA1"/>
+            </a:solidFill>
+            <a:ln>
+              <a:noFill/>
+            </a:ln>
+          </p:spPr>
+          <p:style>
+            <a:lnRef idx="2">
+              <a:schemeClr val="accent1">
+                <a:shade val="50000"/>
+              </a:schemeClr>
+            </a:lnRef>
+            <a:fillRef idx="1">
+              <a:schemeClr val="accent1"/>
+            </a:fillRef>
+            <a:effectRef idx="0">
+              <a:schemeClr val="accent1"/>
+            </a:effectRef>
+            <a:fontRef idx="minor">
+              <a:schemeClr val="lt1"/>
+            </a:fontRef>
+          </p:style>
+          <p:txBody>
+            <a:bodyPr rtlCol="0" anchor="ctr"/>
+            <a:lstStyle/>
+            <a:p>
+              <a:pPr algn="ctr"/>
+              <a:endParaRPr kumimoji="1" lang="ja-JP" altLang="en-US"/>
+            </a:p>
+          </p:txBody>
+        </p:sp>
+        <p:sp>
+          <p:nvSpPr>
+            <p:cNvPr id="55" name="正方形/長方形 54">
+              <a:extLst>
+                <a:ext uri="{FF2B5EF4-FFF2-40B4-BE49-F238E27FC236}">
+                  <a16:creationId xmlns:a16="http://schemas.microsoft.com/office/drawing/2014/main" id="{FEF577FC-6F2D-6B09-5140-17BAB15FFC15}"/>
+                </a:ext>
+              </a:extLst>
+            </p:cNvPr>
+            <p:cNvSpPr/>
+            <p:nvPr/>
+          </p:nvSpPr>
+          <p:spPr>
+            <a:xfrm rot="5400000">
+              <a:off x="6022407" y="1702640"/>
+              <a:ext cx="443719" cy="296533"/>
+            </a:xfrm>
+            <a:prstGeom prst="rect">
+              <a:avLst/>
+            </a:prstGeom>
+            <a:solidFill>
+              <a:srgbClr val="D0BEA1"/>
+            </a:solidFill>
+            <a:ln>
+              <a:noFill/>
+            </a:ln>
+          </p:spPr>
+          <p:style>
+            <a:lnRef idx="2">
+              <a:schemeClr val="accent1">
+                <a:shade val="50000"/>
+              </a:schemeClr>
+            </a:lnRef>
+            <a:fillRef idx="1">
+              <a:schemeClr val="accent1"/>
+            </a:fillRef>
+            <a:effectRef idx="0">
+              <a:schemeClr val="accent1"/>
+            </a:effectRef>
+            <a:fontRef idx="minor">
+              <a:schemeClr val="lt1"/>
+            </a:fontRef>
+          </p:style>
+          <p:txBody>
+            <a:bodyPr rtlCol="0" anchor="ctr"/>
+            <a:lstStyle/>
+            <a:p>
+              <a:pPr algn="ctr"/>
+              <a:endParaRPr kumimoji="1" lang="ja-JP" altLang="en-US"/>
+            </a:p>
+          </p:txBody>
+        </p:sp>
+        <p:sp>
+          <p:nvSpPr>
+            <p:cNvPr id="56" name="正方形/長方形 55">
+              <a:extLst>
+                <a:ext uri="{FF2B5EF4-FFF2-40B4-BE49-F238E27FC236}">
+                  <a16:creationId xmlns:a16="http://schemas.microsoft.com/office/drawing/2014/main" id="{1A92AE57-130A-1937-55BE-03380739237F}"/>
+                </a:ext>
+              </a:extLst>
+            </p:cNvPr>
+            <p:cNvSpPr/>
+            <p:nvPr/>
+          </p:nvSpPr>
+          <p:spPr>
+            <a:xfrm rot="5400000">
+              <a:off x="6022407" y="1199952"/>
+              <a:ext cx="443719" cy="296533"/>
+            </a:xfrm>
+            <a:prstGeom prst="rect">
+              <a:avLst/>
+            </a:prstGeom>
+            <a:solidFill>
+              <a:srgbClr val="D0BEA1"/>
+            </a:solidFill>
+            <a:ln>
+              <a:noFill/>
+            </a:ln>
+          </p:spPr>
+          <p:style>
+            <a:lnRef idx="2">
+              <a:schemeClr val="accent1">
+                <a:shade val="50000"/>
+              </a:schemeClr>
+            </a:lnRef>
+            <a:fillRef idx="1">
+              <a:schemeClr val="accent1"/>
+            </a:fillRef>
+            <a:effectRef idx="0">
+              <a:schemeClr val="accent1"/>
+            </a:effectRef>
+            <a:fontRef idx="minor">
+              <a:schemeClr val="lt1"/>
+            </a:fontRef>
+          </p:style>
+          <p:txBody>
+            <a:bodyPr rtlCol="0" anchor="ctr"/>
+            <a:lstStyle/>
+            <a:p>
+              <a:pPr algn="ctr"/>
+              <a:endParaRPr kumimoji="1" lang="ja-JP" altLang="en-US"/>
+            </a:p>
+          </p:txBody>
+        </p:sp>
+        <p:sp>
+          <p:nvSpPr>
+            <p:cNvPr id="57" name="正方形/長方形 56">
+              <a:extLst>
+                <a:ext uri="{FF2B5EF4-FFF2-40B4-BE49-F238E27FC236}">
+                  <a16:creationId xmlns:a16="http://schemas.microsoft.com/office/drawing/2014/main" id="{ED9F9611-AC20-6E08-1D59-B841D5CEE4D6}"/>
+                </a:ext>
+              </a:extLst>
+            </p:cNvPr>
+            <p:cNvSpPr/>
+            <p:nvPr/>
+          </p:nvSpPr>
+          <p:spPr>
+            <a:xfrm rot="5400000">
+              <a:off x="7552369" y="2210438"/>
+              <a:ext cx="443719" cy="296533"/>
+            </a:xfrm>
+            <a:prstGeom prst="rect">
+              <a:avLst/>
+            </a:prstGeom>
+            <a:solidFill>
+              <a:srgbClr val="D0BEA1"/>
+            </a:solidFill>
+            <a:ln>
+              <a:noFill/>
+            </a:ln>
+          </p:spPr>
+          <p:style>
+            <a:lnRef idx="2">
+              <a:schemeClr val="accent1">
+                <a:shade val="50000"/>
+              </a:schemeClr>
+            </a:lnRef>
+            <a:fillRef idx="1">
+              <a:schemeClr val="accent1"/>
+            </a:fillRef>
+            <a:effectRef idx="0">
+              <a:schemeClr val="accent1"/>
+            </a:effectRef>
+            <a:fontRef idx="minor">
+              <a:schemeClr val="lt1"/>
+            </a:fontRef>
+          </p:style>
+          <p:txBody>
+            <a:bodyPr rtlCol="0" anchor="ctr"/>
+            <a:lstStyle/>
+            <a:p>
+              <a:pPr algn="ctr"/>
+              <a:endParaRPr kumimoji="1" lang="ja-JP" altLang="en-US"/>
+            </a:p>
+          </p:txBody>
+        </p:sp>
+        <p:sp>
+          <p:nvSpPr>
+            <p:cNvPr id="58" name="正方形/長方形 57">
+              <a:extLst>
+                <a:ext uri="{FF2B5EF4-FFF2-40B4-BE49-F238E27FC236}">
+                  <a16:creationId xmlns:a16="http://schemas.microsoft.com/office/drawing/2014/main" id="{8097343E-FBB4-3EAB-86D2-DEAF5F7445C0}"/>
+                </a:ext>
+              </a:extLst>
+            </p:cNvPr>
+            <p:cNvSpPr/>
+            <p:nvPr/>
+          </p:nvSpPr>
+          <p:spPr>
+            <a:xfrm rot="5400000">
+              <a:off x="7552369" y="1702640"/>
+              <a:ext cx="443719" cy="296533"/>
+            </a:xfrm>
+            <a:prstGeom prst="rect">
+              <a:avLst/>
+            </a:prstGeom>
+            <a:solidFill>
+              <a:srgbClr val="D0BEA1"/>
+            </a:solidFill>
+            <a:ln>
+              <a:noFill/>
+            </a:ln>
+          </p:spPr>
+          <p:style>
+            <a:lnRef idx="2">
+              <a:schemeClr val="accent1">
+                <a:shade val="50000"/>
+              </a:schemeClr>
+            </a:lnRef>
+            <a:fillRef idx="1">
+              <a:schemeClr val="accent1"/>
+            </a:fillRef>
+            <a:effectRef idx="0">
+              <a:schemeClr val="accent1"/>
+            </a:effectRef>
+            <a:fontRef idx="minor">
+              <a:schemeClr val="lt1"/>
+            </a:fontRef>
+          </p:style>
+          <p:txBody>
+            <a:bodyPr rtlCol="0" anchor="ctr"/>
+            <a:lstStyle/>
+            <a:p>
+              <a:pPr algn="ctr"/>
+              <a:endParaRPr kumimoji="1" lang="ja-JP" altLang="en-US"/>
+            </a:p>
+          </p:txBody>
+        </p:sp>
+        <p:sp>
+          <p:nvSpPr>
+            <p:cNvPr id="59" name="正方形/長方形 58">
+              <a:extLst>
+                <a:ext uri="{FF2B5EF4-FFF2-40B4-BE49-F238E27FC236}">
+                  <a16:creationId xmlns:a16="http://schemas.microsoft.com/office/drawing/2014/main" id="{3515AB89-6C77-C91D-ADB7-FB11C49E6FC6}"/>
+                </a:ext>
+              </a:extLst>
+            </p:cNvPr>
+            <p:cNvSpPr/>
+            <p:nvPr/>
+          </p:nvSpPr>
+          <p:spPr>
+            <a:xfrm rot="5400000">
+              <a:off x="7552369" y="1199952"/>
+              <a:ext cx="443719" cy="296533"/>
+            </a:xfrm>
+            <a:prstGeom prst="rect">
+              <a:avLst/>
+            </a:prstGeom>
+            <a:solidFill>
+              <a:srgbClr val="D0BEA1"/>
+            </a:solidFill>
+            <a:ln>
+              <a:noFill/>
+            </a:ln>
+          </p:spPr>
+          <p:style>
+            <a:lnRef idx="2">
+              <a:schemeClr val="accent1">
+                <a:shade val="50000"/>
+              </a:schemeClr>
+            </a:lnRef>
+            <a:fillRef idx="1">
+              <a:schemeClr val="accent1"/>
+            </a:fillRef>
+            <a:effectRef idx="0">
+              <a:schemeClr val="accent1"/>
+            </a:effectRef>
+            <a:fontRef idx="minor">
+              <a:schemeClr val="lt1"/>
+            </a:fontRef>
+          </p:style>
+          <p:txBody>
+            <a:bodyPr rtlCol="0" anchor="ctr"/>
+            <a:lstStyle/>
+            <a:p>
+              <a:pPr algn="ctr"/>
+              <a:endParaRPr kumimoji="1" lang="ja-JP" altLang="en-US"/>
+            </a:p>
+          </p:txBody>
+        </p:sp>
+        <p:sp>
+          <p:nvSpPr>
+            <p:cNvPr id="60" name="正方形/長方形 59">
+              <a:extLst>
+                <a:ext uri="{FF2B5EF4-FFF2-40B4-BE49-F238E27FC236}">
+                  <a16:creationId xmlns:a16="http://schemas.microsoft.com/office/drawing/2014/main" id="{1D863677-1A9C-7448-82EA-9B52B3F0AF93}"/>
+                </a:ext>
+              </a:extLst>
+            </p:cNvPr>
+            <p:cNvSpPr/>
+            <p:nvPr/>
+          </p:nvSpPr>
+          <p:spPr>
+            <a:xfrm>
+              <a:off x="6180699" y="346041"/>
+              <a:ext cx="661646" cy="258555"/>
+            </a:xfrm>
+            <a:prstGeom prst="rect">
+              <a:avLst/>
+            </a:prstGeom>
+            <a:solidFill>
+              <a:schemeClr val="bg1">
+                <a:lumMod val="95000"/>
+              </a:schemeClr>
+            </a:solidFill>
+            <a:ln>
+              <a:noFill/>
+            </a:ln>
+          </p:spPr>
+          <p:style>
+            <a:lnRef idx="2">
+              <a:schemeClr val="accent1">
+                <a:shade val="50000"/>
+              </a:schemeClr>
+            </a:lnRef>
+            <a:fillRef idx="1">
+              <a:schemeClr val="accent1"/>
+            </a:fillRef>
+            <a:effectRef idx="0">
+              <a:schemeClr val="accent1"/>
+            </a:effectRef>
+            <a:fontRef idx="minor">
+              <a:schemeClr val="lt1"/>
+            </a:fontRef>
+          </p:style>
+          <p:txBody>
+            <a:bodyPr rtlCol="0" anchor="ctr"/>
+            <a:lstStyle/>
+            <a:p>
+              <a:pPr algn="ctr"/>
+              <a:endParaRPr kumimoji="1" lang="ja-JP" altLang="en-US"/>
+            </a:p>
+          </p:txBody>
+        </p:sp>
+        <p:sp>
+          <p:nvSpPr>
+            <p:cNvPr id="61" name="四角形: 1 つの角を切り取り 1 つの角を丸める 60">
+              <a:extLst>
+                <a:ext uri="{FF2B5EF4-FFF2-40B4-BE49-F238E27FC236}">
+                  <a16:creationId xmlns:a16="http://schemas.microsoft.com/office/drawing/2014/main" id="{DD511248-C5F0-9D44-6CCA-9E5E5C5D0DA7}"/>
+                </a:ext>
+              </a:extLst>
+            </p:cNvPr>
+            <p:cNvSpPr/>
+            <p:nvPr/>
+          </p:nvSpPr>
+          <p:spPr>
+            <a:xfrm>
+              <a:off x="7228685" y="310881"/>
+              <a:ext cx="661646" cy="258555"/>
+            </a:xfrm>
+            <a:prstGeom prst="snipRoundRect">
+              <a:avLst>
+                <a:gd name="adj1" fmla="val 0"/>
+                <a:gd name="adj2" fmla="val 24772"/>
+              </a:avLst>
+            </a:prstGeom>
+            <a:solidFill>
+              <a:srgbClr val="DAA600"/>
+            </a:solidFill>
+            <a:ln>
+              <a:noFill/>
+            </a:ln>
+          </p:spPr>
+          <p:style>
+            <a:lnRef idx="2">
+              <a:schemeClr val="accent1">
+                <a:shade val="50000"/>
+              </a:schemeClr>
+            </a:lnRef>
+            <a:fillRef idx="1">
+              <a:schemeClr val="accent1"/>
+            </a:fillRef>
+            <a:effectRef idx="0">
+              <a:schemeClr val="accent1"/>
+            </a:effectRef>
+            <a:fontRef idx="minor">
+              <a:schemeClr val="lt1"/>
+            </a:fontRef>
+          </p:style>
+          <p:txBody>
+            <a:bodyPr rtlCol="0" anchor="ctr"/>
+            <a:lstStyle/>
+            <a:p>
+              <a:pPr algn="ctr"/>
+              <a:endParaRPr kumimoji="1" lang="ja-JP" altLang="en-US"/>
+            </a:p>
+          </p:txBody>
+        </p:sp>
+        <p:sp>
+          <p:nvSpPr>
+            <p:cNvPr id="62" name="正方形/長方形 61">
+              <a:extLst>
+                <a:ext uri="{FF2B5EF4-FFF2-40B4-BE49-F238E27FC236}">
+                  <a16:creationId xmlns:a16="http://schemas.microsoft.com/office/drawing/2014/main" id="{F5EBA906-8F5E-FD41-109F-6D71EF34C98F}"/>
+                </a:ext>
+              </a:extLst>
+            </p:cNvPr>
+            <p:cNvSpPr/>
+            <p:nvPr/>
+          </p:nvSpPr>
+          <p:spPr>
+            <a:xfrm>
+              <a:off x="7263068" y="326891"/>
+              <a:ext cx="545528" cy="224019"/>
+            </a:xfrm>
+            <a:prstGeom prst="rect">
+              <a:avLst/>
+            </a:prstGeom>
+            <a:solidFill>
+              <a:schemeClr val="bg1">
+                <a:lumMod val="95000"/>
+              </a:schemeClr>
+            </a:solidFill>
+            <a:ln>
+              <a:noFill/>
+            </a:ln>
+          </p:spPr>
+          <p:style>
+            <a:lnRef idx="2">
+              <a:schemeClr val="accent1">
+                <a:shade val="50000"/>
+              </a:schemeClr>
+            </a:lnRef>
+            <a:fillRef idx="1">
+              <a:schemeClr val="accent1"/>
+            </a:fillRef>
+            <a:effectRef idx="0">
+              <a:schemeClr val="accent1"/>
+            </a:effectRef>
+            <a:fontRef idx="minor">
+              <a:schemeClr val="lt1"/>
+            </a:fontRef>
+          </p:style>
+          <p:txBody>
+            <a:bodyPr rtlCol="0" anchor="ctr"/>
+            <a:lstStyle/>
+            <a:p>
+              <a:pPr algn="ctr"/>
+              <a:endParaRPr kumimoji="1" lang="ja-JP" altLang="en-US"/>
+            </a:p>
+          </p:txBody>
+        </p:sp>
+        <p:sp>
+          <p:nvSpPr>
+            <p:cNvPr id="63" name="楕円 62">
+              <a:extLst>
+                <a:ext uri="{FF2B5EF4-FFF2-40B4-BE49-F238E27FC236}">
+                  <a16:creationId xmlns:a16="http://schemas.microsoft.com/office/drawing/2014/main" id="{4BDBC986-7D1D-0F93-FE4E-2EE2E3A95062}"/>
+                </a:ext>
+              </a:extLst>
+            </p:cNvPr>
+            <p:cNvSpPr/>
+            <p:nvPr/>
+          </p:nvSpPr>
+          <p:spPr>
+            <a:xfrm>
+              <a:off x="7407788" y="377121"/>
+              <a:ext cx="151720" cy="151720"/>
+            </a:xfrm>
+            <a:prstGeom prst="ellipse">
+              <a:avLst/>
+            </a:prstGeom>
+            <a:solidFill>
+              <a:schemeClr val="bg1">
+                <a:lumMod val="50000"/>
+              </a:schemeClr>
+            </a:solidFill>
+            <a:ln>
+              <a:noFill/>
+            </a:ln>
+          </p:spPr>
+          <p:style>
+            <a:lnRef idx="2">
+              <a:schemeClr val="accent1">
+                <a:shade val="50000"/>
+              </a:schemeClr>
+            </a:lnRef>
+            <a:fillRef idx="1">
+              <a:schemeClr val="accent1"/>
+            </a:fillRef>
+            <a:effectRef idx="0">
+              <a:schemeClr val="accent1"/>
+            </a:effectRef>
+            <a:fontRef idx="minor">
+              <a:schemeClr val="lt1"/>
+            </a:fontRef>
+          </p:style>
+          <p:txBody>
+            <a:bodyPr rtlCol="0" anchor="ctr"/>
+            <a:lstStyle/>
+            <a:p>
+              <a:pPr algn="ctr"/>
+              <a:endParaRPr kumimoji="1" lang="ja-JP" altLang="en-US"/>
+            </a:p>
+          </p:txBody>
+        </p:sp>
+        <p:sp>
+          <p:nvSpPr>
+            <p:cNvPr id="128" name="正方形/長方形 127">
+              <a:extLst>
+                <a:ext uri="{FF2B5EF4-FFF2-40B4-BE49-F238E27FC236}">
+                  <a16:creationId xmlns:a16="http://schemas.microsoft.com/office/drawing/2014/main" id="{C66A60DC-D7B3-4484-300A-53D939E2F031}"/>
+                </a:ext>
+              </a:extLst>
+            </p:cNvPr>
+            <p:cNvSpPr/>
+            <p:nvPr/>
+          </p:nvSpPr>
+          <p:spPr>
+            <a:xfrm>
+              <a:off x="7407788" y="864082"/>
+              <a:ext cx="169441" cy="161179"/>
+            </a:xfrm>
+            <a:prstGeom prst="rect">
+              <a:avLst/>
+            </a:prstGeom>
+            <a:solidFill>
+              <a:schemeClr val="tx1">
+                <a:lumMod val="75000"/>
+                <a:lumOff val="25000"/>
+              </a:schemeClr>
+            </a:solidFill>
+            <a:ln>
+              <a:noFill/>
+            </a:ln>
+          </p:spPr>
+          <p:style>
+            <a:lnRef idx="2">
+              <a:schemeClr val="accent1">
+                <a:shade val="50000"/>
+              </a:schemeClr>
+            </a:lnRef>
+            <a:fillRef idx="1">
+              <a:schemeClr val="accent1"/>
+            </a:fillRef>
+            <a:effectRef idx="0">
+              <a:schemeClr val="accent1"/>
+            </a:effectRef>
+            <a:fontRef idx="minor">
+              <a:schemeClr val="lt1"/>
+            </a:fontRef>
+          </p:style>
+          <p:txBody>
+            <a:bodyPr rtlCol="0" anchor="ctr"/>
+            <a:lstStyle/>
+            <a:p>
+              <a:pPr algn="ctr"/>
+              <a:endParaRPr kumimoji="1" lang="ja-JP" altLang="en-US"/>
+            </a:p>
+          </p:txBody>
+        </p:sp>
+      </p:grpSp>
     </p:spTree>
     <p:extLst>
       <p:ext uri="{BB962C8B-B14F-4D97-AF65-F5344CB8AC3E}">

--- a/assets/device_icons.pptx
+++ b/assets/device_icons.pptx
@@ -274,7 +274,7 @@
           <a:p>
             <a:fld id="{30D63992-91CA-41F7-A16C-71C1C327BEB8}" type="datetimeFigureOut">
               <a:rPr kumimoji="1" lang="ja-JP" altLang="en-US" smtClean="0"/>
-              <a:t>2026/6/2</a:t>
+              <a:t>2026/6/11</a:t>
             </a:fld>
             <a:endParaRPr kumimoji="1" lang="ja-JP" altLang="en-US"/>
           </a:p>
@@ -504,7 +504,7 @@
           <a:p>
             <a:fld id="{30D63992-91CA-41F7-A16C-71C1C327BEB8}" type="datetimeFigureOut">
               <a:rPr kumimoji="1" lang="ja-JP" altLang="en-US" smtClean="0"/>
-              <a:t>2026/6/2</a:t>
+              <a:t>2026/6/11</a:t>
             </a:fld>
             <a:endParaRPr kumimoji="1" lang="ja-JP" altLang="en-US"/>
           </a:p>
@@ -744,7 +744,7 @@
           <a:p>
             <a:fld id="{30D63992-91CA-41F7-A16C-71C1C327BEB8}" type="datetimeFigureOut">
               <a:rPr kumimoji="1" lang="ja-JP" altLang="en-US" smtClean="0"/>
-              <a:t>2026/6/2</a:t>
+              <a:t>2026/6/11</a:t>
             </a:fld>
             <a:endParaRPr kumimoji="1" lang="ja-JP" altLang="en-US"/>
           </a:p>
@@ -974,7 +974,7 @@
           <a:p>
             <a:fld id="{30D63992-91CA-41F7-A16C-71C1C327BEB8}" type="datetimeFigureOut">
               <a:rPr kumimoji="1" lang="ja-JP" altLang="en-US" smtClean="0"/>
-              <a:t>2026/6/2</a:t>
+              <a:t>2026/6/11</a:t>
             </a:fld>
             <a:endParaRPr kumimoji="1" lang="ja-JP" altLang="en-US"/>
           </a:p>
@@ -1249,7 +1249,7 @@
           <a:p>
             <a:fld id="{30D63992-91CA-41F7-A16C-71C1C327BEB8}" type="datetimeFigureOut">
               <a:rPr kumimoji="1" lang="ja-JP" altLang="en-US" smtClean="0"/>
-              <a:t>2026/6/2</a:t>
+              <a:t>2026/6/11</a:t>
             </a:fld>
             <a:endParaRPr kumimoji="1" lang="ja-JP" altLang="en-US"/>
           </a:p>
@@ -1578,7 +1578,7 @@
           <a:p>
             <a:fld id="{30D63992-91CA-41F7-A16C-71C1C327BEB8}" type="datetimeFigureOut">
               <a:rPr kumimoji="1" lang="ja-JP" altLang="en-US" smtClean="0"/>
-              <a:t>2026/6/2</a:t>
+              <a:t>2026/6/11</a:t>
             </a:fld>
             <a:endParaRPr kumimoji="1" lang="ja-JP" altLang="en-US"/>
           </a:p>
@@ -2054,7 +2054,7 @@
           <a:p>
             <a:fld id="{30D63992-91CA-41F7-A16C-71C1C327BEB8}" type="datetimeFigureOut">
               <a:rPr kumimoji="1" lang="ja-JP" altLang="en-US" smtClean="0"/>
-              <a:t>2026/6/2</a:t>
+              <a:t>2026/6/11</a:t>
             </a:fld>
             <a:endParaRPr kumimoji="1" lang="ja-JP" altLang="en-US"/>
           </a:p>
@@ -2195,7 +2195,7 @@
           <a:p>
             <a:fld id="{30D63992-91CA-41F7-A16C-71C1C327BEB8}" type="datetimeFigureOut">
               <a:rPr kumimoji="1" lang="ja-JP" altLang="en-US" smtClean="0"/>
-              <a:t>2026/6/2</a:t>
+              <a:t>2026/6/11</a:t>
             </a:fld>
             <a:endParaRPr kumimoji="1" lang="ja-JP" altLang="en-US"/>
           </a:p>
@@ -2308,7 +2308,7 @@
           <a:p>
             <a:fld id="{30D63992-91CA-41F7-A16C-71C1C327BEB8}" type="datetimeFigureOut">
               <a:rPr kumimoji="1" lang="ja-JP" altLang="en-US" smtClean="0"/>
-              <a:t>2026/6/2</a:t>
+              <a:t>2026/6/11</a:t>
             </a:fld>
             <a:endParaRPr kumimoji="1" lang="ja-JP" altLang="en-US"/>
           </a:p>
@@ -2651,7 +2651,7 @@
           <a:p>
             <a:fld id="{30D63992-91CA-41F7-A16C-71C1C327BEB8}" type="datetimeFigureOut">
               <a:rPr kumimoji="1" lang="ja-JP" altLang="en-US" smtClean="0"/>
-              <a:t>2026/6/2</a:t>
+              <a:t>2026/6/11</a:t>
             </a:fld>
             <a:endParaRPr kumimoji="1" lang="ja-JP" altLang="en-US"/>
           </a:p>
@@ -2939,7 +2939,7 @@
           <a:p>
             <a:fld id="{30D63992-91CA-41F7-A16C-71C1C327BEB8}" type="datetimeFigureOut">
               <a:rPr kumimoji="1" lang="ja-JP" altLang="en-US" smtClean="0"/>
-              <a:t>2026/6/2</a:t>
+              <a:t>2026/6/11</a:t>
             </a:fld>
             <a:endParaRPr kumimoji="1" lang="ja-JP" altLang="en-US"/>
           </a:p>
@@ -3212,7 +3212,7 @@
           <a:p>
             <a:fld id="{30D63992-91CA-41F7-A16C-71C1C327BEB8}" type="datetimeFigureOut">
               <a:rPr kumimoji="1" lang="ja-JP" altLang="en-US" smtClean="0"/>
-              <a:t>2026/6/2</a:t>
+              <a:t>2026/6/11</a:t>
             </a:fld>
             <a:endParaRPr kumimoji="1" lang="ja-JP" altLang="en-US"/>
           </a:p>
@@ -14532,6 +14532,1286 @@
           </p:txBody>
         </p:sp>
       </p:grpSp>
+      <p:grpSp>
+        <p:nvGrpSpPr>
+          <p:cNvPr id="148" name="グループ化 147">
+            <a:extLst>
+              <a:ext uri="{FF2B5EF4-FFF2-40B4-BE49-F238E27FC236}">
+                <a16:creationId xmlns:a16="http://schemas.microsoft.com/office/drawing/2014/main" id="{82F8E2B5-A563-1EB6-13DD-52AC1200CF64}"/>
+              </a:ext>
+            </a:extLst>
+          </p:cNvPr>
+          <p:cNvGrpSpPr/>
+          <p:nvPr/>
+        </p:nvGrpSpPr>
+        <p:grpSpPr>
+          <a:xfrm>
+            <a:off x="8291140" y="702748"/>
+            <a:ext cx="2654158" cy="3210760"/>
+            <a:chOff x="8291140" y="702748"/>
+            <a:chExt cx="2654158" cy="3210760"/>
+          </a:xfrm>
+        </p:grpSpPr>
+        <p:sp>
+          <p:nvSpPr>
+            <p:cNvPr id="144" name="四角形: 上の 2 つの角を丸める 143">
+              <a:extLst>
+                <a:ext uri="{FF2B5EF4-FFF2-40B4-BE49-F238E27FC236}">
+                  <a16:creationId xmlns:a16="http://schemas.microsoft.com/office/drawing/2014/main" id="{0FF3A220-F252-646E-8FD8-2C1D52B07132}"/>
+                </a:ext>
+              </a:extLst>
+            </p:cNvPr>
+            <p:cNvSpPr/>
+            <p:nvPr/>
+          </p:nvSpPr>
+          <p:spPr>
+            <a:xfrm>
+              <a:off x="10028467" y="1581220"/>
+              <a:ext cx="136818" cy="198455"/>
+            </a:xfrm>
+            <a:prstGeom prst="round2SameRect">
+              <a:avLst>
+                <a:gd name="adj1" fmla="val 0"/>
+                <a:gd name="adj2" fmla="val 0"/>
+              </a:avLst>
+            </a:prstGeom>
+            <a:solidFill>
+              <a:schemeClr val="accent4">
+                <a:lumMod val="75000"/>
+              </a:schemeClr>
+            </a:solidFill>
+            <a:ln w="28575">
+              <a:noFill/>
+            </a:ln>
+          </p:spPr>
+          <p:style>
+            <a:lnRef idx="2">
+              <a:schemeClr val="accent1">
+                <a:shade val="50000"/>
+              </a:schemeClr>
+            </a:lnRef>
+            <a:fillRef idx="1">
+              <a:schemeClr val="accent1"/>
+            </a:fillRef>
+            <a:effectRef idx="0">
+              <a:schemeClr val="accent1"/>
+            </a:effectRef>
+            <a:fontRef idx="minor">
+              <a:schemeClr val="lt1"/>
+            </a:fontRef>
+          </p:style>
+          <p:txBody>
+            <a:bodyPr rtlCol="0" anchor="ctr"/>
+            <a:lstStyle/>
+            <a:p>
+              <a:pPr algn="ctr"/>
+              <a:endParaRPr kumimoji="1" lang="ja-JP" altLang="en-US"/>
+            </a:p>
+          </p:txBody>
+        </p:sp>
+        <p:sp>
+          <p:nvSpPr>
+            <p:cNvPr id="147" name="四角形: 上の 2 つの角を丸める 146">
+              <a:extLst>
+                <a:ext uri="{FF2B5EF4-FFF2-40B4-BE49-F238E27FC236}">
+                  <a16:creationId xmlns:a16="http://schemas.microsoft.com/office/drawing/2014/main" id="{1CB0DB8C-A712-3359-7F42-F6B2914069FD}"/>
+                </a:ext>
+              </a:extLst>
+            </p:cNvPr>
+            <p:cNvSpPr/>
+            <p:nvPr/>
+          </p:nvSpPr>
+          <p:spPr>
+            <a:xfrm>
+              <a:off x="9495868" y="1581220"/>
+              <a:ext cx="136818" cy="198455"/>
+            </a:xfrm>
+            <a:prstGeom prst="round2SameRect">
+              <a:avLst>
+                <a:gd name="adj1" fmla="val 0"/>
+                <a:gd name="adj2" fmla="val 0"/>
+              </a:avLst>
+            </a:prstGeom>
+            <a:solidFill>
+              <a:schemeClr val="accent4">
+                <a:lumMod val="75000"/>
+              </a:schemeClr>
+            </a:solidFill>
+            <a:ln w="28575">
+              <a:noFill/>
+            </a:ln>
+          </p:spPr>
+          <p:style>
+            <a:lnRef idx="2">
+              <a:schemeClr val="accent1">
+                <a:shade val="50000"/>
+              </a:schemeClr>
+            </a:lnRef>
+            <a:fillRef idx="1">
+              <a:schemeClr val="accent1"/>
+            </a:fillRef>
+            <a:effectRef idx="0">
+              <a:schemeClr val="accent1"/>
+            </a:effectRef>
+            <a:fontRef idx="minor">
+              <a:schemeClr val="lt1"/>
+            </a:fontRef>
+          </p:style>
+          <p:txBody>
+            <a:bodyPr rtlCol="0" anchor="ctr"/>
+            <a:lstStyle/>
+            <a:p>
+              <a:pPr algn="ctr"/>
+              <a:endParaRPr kumimoji="1" lang="ja-JP" altLang="en-US"/>
+            </a:p>
+          </p:txBody>
+        </p:sp>
+        <p:grpSp>
+          <p:nvGrpSpPr>
+            <p:cNvPr id="131" name="グループ化 130">
+              <a:extLst>
+                <a:ext uri="{FF2B5EF4-FFF2-40B4-BE49-F238E27FC236}">
+                  <a16:creationId xmlns:a16="http://schemas.microsoft.com/office/drawing/2014/main" id="{080B16C5-0B96-6DC2-FF2E-9D3540684FB9}"/>
+                </a:ext>
+              </a:extLst>
+            </p:cNvPr>
+            <p:cNvGrpSpPr/>
+            <p:nvPr/>
+          </p:nvGrpSpPr>
+          <p:grpSpPr>
+            <a:xfrm>
+              <a:off x="9328675" y="1777227"/>
+              <a:ext cx="1005752" cy="2136281"/>
+              <a:chOff x="9402644" y="1275473"/>
+              <a:chExt cx="1005752" cy="2136281"/>
+            </a:xfrm>
+          </p:grpSpPr>
+          <p:sp>
+            <p:nvSpPr>
+              <p:cNvPr id="13" name="四角形: 角を丸くする 12">
+                <a:extLst>
+                  <a:ext uri="{FF2B5EF4-FFF2-40B4-BE49-F238E27FC236}">
+                    <a16:creationId xmlns:a16="http://schemas.microsoft.com/office/drawing/2014/main" id="{1A115E63-BE76-CB5E-EC7B-3F0232B2D074}"/>
+                  </a:ext>
+                </a:extLst>
+              </p:cNvPr>
+              <p:cNvSpPr/>
+              <p:nvPr/>
+            </p:nvSpPr>
+            <p:spPr>
+              <a:xfrm>
+                <a:off x="9402644" y="1275473"/>
+                <a:ext cx="1005752" cy="2120615"/>
+              </a:xfrm>
+              <a:prstGeom prst="roundRect">
+                <a:avLst>
+                  <a:gd name="adj" fmla="val 10000"/>
+                </a:avLst>
+              </a:prstGeom>
+              <a:solidFill>
+                <a:schemeClr val="tx1">
+                  <a:lumMod val="65000"/>
+                  <a:lumOff val="35000"/>
+                </a:schemeClr>
+              </a:solidFill>
+              <a:ln w="28575">
+                <a:solidFill>
+                  <a:schemeClr val="tx1">
+                    <a:lumMod val="75000"/>
+                    <a:lumOff val="25000"/>
+                  </a:schemeClr>
+                </a:solidFill>
+              </a:ln>
+            </p:spPr>
+            <p:style>
+              <a:lnRef idx="2">
+                <a:schemeClr val="accent1">
+                  <a:shade val="50000"/>
+                </a:schemeClr>
+              </a:lnRef>
+              <a:fillRef idx="1">
+                <a:schemeClr val="accent1"/>
+              </a:fillRef>
+              <a:effectRef idx="0">
+                <a:schemeClr val="accent1"/>
+              </a:effectRef>
+              <a:fontRef idx="minor">
+                <a:schemeClr val="lt1"/>
+              </a:fontRef>
+            </p:style>
+            <p:txBody>
+              <a:bodyPr rtlCol="0" anchor="ctr"/>
+              <a:lstStyle/>
+              <a:p>
+                <a:pPr algn="ctr"/>
+                <a:endParaRPr kumimoji="1" lang="ja-JP" altLang="en-US"/>
+              </a:p>
+            </p:txBody>
+          </p:sp>
+          <p:sp>
+            <p:nvSpPr>
+              <p:cNvPr id="14" name="正方形/長方形 13">
+                <a:extLst>
+                  <a:ext uri="{FF2B5EF4-FFF2-40B4-BE49-F238E27FC236}">
+                    <a16:creationId xmlns:a16="http://schemas.microsoft.com/office/drawing/2014/main" id="{CFCAEF3A-A4E9-799F-169D-826564F74BB7}"/>
+                  </a:ext>
+                </a:extLst>
+              </p:cNvPr>
+              <p:cNvSpPr/>
+              <p:nvPr/>
+            </p:nvSpPr>
+            <p:spPr>
+              <a:xfrm>
+                <a:off x="9568248" y="1880027"/>
+                <a:ext cx="674544" cy="467712"/>
+              </a:xfrm>
+              <a:prstGeom prst="rect">
+                <a:avLst/>
+              </a:prstGeom>
+              <a:solidFill>
+                <a:schemeClr val="tx1">
+                  <a:lumMod val="95000"/>
+                  <a:lumOff val="5000"/>
+                </a:schemeClr>
+              </a:solidFill>
+              <a:ln>
+                <a:noFill/>
+              </a:ln>
+            </p:spPr>
+            <p:style>
+              <a:lnRef idx="2">
+                <a:schemeClr val="accent1">
+                  <a:shade val="50000"/>
+                </a:schemeClr>
+              </a:lnRef>
+              <a:fillRef idx="1">
+                <a:schemeClr val="accent1"/>
+              </a:fillRef>
+              <a:effectRef idx="0">
+                <a:schemeClr val="accent1"/>
+              </a:effectRef>
+              <a:fontRef idx="minor">
+                <a:schemeClr val="lt1"/>
+              </a:fontRef>
+            </p:style>
+            <p:txBody>
+              <a:bodyPr rtlCol="0" anchor="ctr"/>
+              <a:lstStyle/>
+              <a:p>
+                <a:pPr algn="ctr"/>
+                <a:endParaRPr kumimoji="1" lang="ja-JP" altLang="en-US"/>
+              </a:p>
+            </p:txBody>
+          </p:sp>
+          <p:sp>
+            <p:nvSpPr>
+              <p:cNvPr id="17" name="四角形: 角を丸くする 16">
+                <a:extLst>
+                  <a:ext uri="{FF2B5EF4-FFF2-40B4-BE49-F238E27FC236}">
+                    <a16:creationId xmlns:a16="http://schemas.microsoft.com/office/drawing/2014/main" id="{5DF4D089-5278-9537-3D77-9F5F8EEEEEB8}"/>
+                  </a:ext>
+                </a:extLst>
+              </p:cNvPr>
+              <p:cNvSpPr/>
+              <p:nvPr/>
+            </p:nvSpPr>
+            <p:spPr>
+              <a:xfrm>
+                <a:off x="9596866" y="2425806"/>
+                <a:ext cx="617308" cy="415925"/>
+              </a:xfrm>
+              <a:prstGeom prst="roundRect">
+                <a:avLst/>
+              </a:prstGeom>
+              <a:solidFill>
+                <a:schemeClr val="tx1">
+                  <a:lumMod val="65000"/>
+                  <a:lumOff val="35000"/>
+                </a:schemeClr>
+              </a:solidFill>
+              <a:ln w="19050">
+                <a:solidFill>
+                  <a:schemeClr val="tx1">
+                    <a:lumMod val="95000"/>
+                    <a:lumOff val="5000"/>
+                  </a:schemeClr>
+                </a:solidFill>
+              </a:ln>
+            </p:spPr>
+            <p:style>
+              <a:lnRef idx="2">
+                <a:schemeClr val="accent1">
+                  <a:shade val="50000"/>
+                </a:schemeClr>
+              </a:lnRef>
+              <a:fillRef idx="1">
+                <a:schemeClr val="accent1"/>
+              </a:fillRef>
+              <a:effectRef idx="0">
+                <a:schemeClr val="accent1"/>
+              </a:effectRef>
+              <a:fontRef idx="minor">
+                <a:schemeClr val="lt1"/>
+              </a:fontRef>
+            </p:style>
+            <p:txBody>
+              <a:bodyPr rtlCol="0" anchor="ctr"/>
+              <a:lstStyle/>
+              <a:p>
+                <a:pPr algn="ctr"/>
+                <a:endParaRPr kumimoji="1" lang="ja-JP" altLang="en-US"/>
+              </a:p>
+            </p:txBody>
+          </p:sp>
+          <p:sp>
+            <p:nvSpPr>
+              <p:cNvPr id="25" name="正方形/長方形 24">
+                <a:extLst>
+                  <a:ext uri="{FF2B5EF4-FFF2-40B4-BE49-F238E27FC236}">
+                    <a16:creationId xmlns:a16="http://schemas.microsoft.com/office/drawing/2014/main" id="{30D145F0-CE39-EACB-E7A6-907B0C0ECD50}"/>
+                  </a:ext>
+                </a:extLst>
+              </p:cNvPr>
+              <p:cNvSpPr/>
+              <p:nvPr/>
+            </p:nvSpPr>
+            <p:spPr>
+              <a:xfrm>
+                <a:off x="9520410" y="2770712"/>
+                <a:ext cx="730273" cy="92075"/>
+              </a:xfrm>
+              <a:prstGeom prst="rect">
+                <a:avLst/>
+              </a:prstGeom>
+              <a:solidFill>
+                <a:schemeClr val="tx1">
+                  <a:lumMod val="65000"/>
+                  <a:lumOff val="35000"/>
+                </a:schemeClr>
+              </a:solidFill>
+              <a:ln>
+                <a:noFill/>
+              </a:ln>
+            </p:spPr>
+            <p:style>
+              <a:lnRef idx="2">
+                <a:schemeClr val="accent1">
+                  <a:shade val="50000"/>
+                </a:schemeClr>
+              </a:lnRef>
+              <a:fillRef idx="1">
+                <a:schemeClr val="accent1"/>
+              </a:fillRef>
+              <a:effectRef idx="0">
+                <a:schemeClr val="accent1"/>
+              </a:effectRef>
+              <a:fontRef idx="minor">
+                <a:schemeClr val="lt1"/>
+              </a:fontRef>
+            </p:style>
+            <p:txBody>
+              <a:bodyPr rtlCol="0" anchor="ctr"/>
+              <a:lstStyle/>
+              <a:p>
+                <a:pPr algn="ctr"/>
+                <a:endParaRPr kumimoji="1" lang="ja-JP" altLang="en-US"/>
+              </a:p>
+            </p:txBody>
+          </p:sp>
+          <p:sp>
+            <p:nvSpPr>
+              <p:cNvPr id="39" name="テキスト ボックス 38">
+                <a:extLst>
+                  <a:ext uri="{FF2B5EF4-FFF2-40B4-BE49-F238E27FC236}">
+                    <a16:creationId xmlns:a16="http://schemas.microsoft.com/office/drawing/2014/main" id="{9CF4B86C-BE69-95D9-0165-EA02F734C1B3}"/>
+                  </a:ext>
+                </a:extLst>
+              </p:cNvPr>
+              <p:cNvSpPr txBox="1"/>
+              <p:nvPr/>
+            </p:nvSpPr>
+            <p:spPr>
+              <a:xfrm>
+                <a:off x="9429270" y="1886073"/>
+                <a:ext cx="952500" cy="461665"/>
+              </a:xfrm>
+              <a:prstGeom prst="rect">
+                <a:avLst/>
+              </a:prstGeom>
+              <a:noFill/>
+            </p:spPr>
+            <p:txBody>
+              <a:bodyPr wrap="square" rtlCol="0">
+                <a:spAutoFit/>
+              </a:bodyPr>
+              <a:lstStyle/>
+              <a:p>
+                <a:pPr algn="ctr"/>
+                <a:r>
+                  <a:rPr kumimoji="1" lang="en-US" altLang="ja-JP" sz="1200" b="1">
+                    <a:solidFill>
+                      <a:schemeClr val="bg1"/>
+                    </a:solidFill>
+                    <a:latin typeface="Arial" panose="020B0604020202020204" pitchFamily="34" charset="0"/>
+                    <a:cs typeface="Arial" panose="020B0604020202020204" pitchFamily="34" charset="0"/>
+                  </a:rPr>
+                  <a:t>M5Stack</a:t>
+                </a:r>
+                <a:br>
+                  <a:rPr kumimoji="1" lang="en-US" altLang="ja-JP" sz="1200" b="1">
+                    <a:solidFill>
+                      <a:schemeClr val="bg1"/>
+                    </a:solidFill>
+                    <a:latin typeface="Arial" panose="020B0604020202020204" pitchFamily="34" charset="0"/>
+                    <a:cs typeface="Arial" panose="020B0604020202020204" pitchFamily="34" charset="0"/>
+                  </a:rPr>
+                </a:br>
+                <a:r>
+                  <a:rPr kumimoji="1" lang="en-US" altLang="ja-JP" sz="1200" b="1">
+                    <a:solidFill>
+                      <a:schemeClr val="bg1"/>
+                    </a:solidFill>
+                    <a:latin typeface="Arial" panose="020B0604020202020204" pitchFamily="34" charset="0"/>
+                    <a:cs typeface="Arial" panose="020B0604020202020204" pitchFamily="34" charset="0"/>
+                  </a:rPr>
+                  <a:t>Unit C6L</a:t>
+                </a:r>
+                <a:endParaRPr kumimoji="1" lang="ja-JP" altLang="en-US" sz="1200" b="1" dirty="0">
+                  <a:solidFill>
+                    <a:schemeClr val="bg1"/>
+                  </a:solidFill>
+                  <a:latin typeface="Arial" panose="020B0604020202020204" pitchFamily="34" charset="0"/>
+                  <a:cs typeface="Arial" panose="020B0604020202020204" pitchFamily="34" charset="0"/>
+                </a:endParaRPr>
+              </a:p>
+            </p:txBody>
+          </p:sp>
+          <p:sp>
+            <p:nvSpPr>
+              <p:cNvPr id="40" name="正方形/長方形 39">
+                <a:extLst>
+                  <a:ext uri="{FF2B5EF4-FFF2-40B4-BE49-F238E27FC236}">
+                    <a16:creationId xmlns:a16="http://schemas.microsoft.com/office/drawing/2014/main" id="{BDBEBF26-D485-E01D-85C2-22BDA1E700A6}"/>
+                  </a:ext>
+                </a:extLst>
+              </p:cNvPr>
+              <p:cNvSpPr/>
+              <p:nvPr/>
+            </p:nvSpPr>
+            <p:spPr>
+              <a:xfrm>
+                <a:off x="9490315" y="1337899"/>
+                <a:ext cx="830410" cy="467712"/>
+              </a:xfrm>
+              <a:prstGeom prst="rect">
+                <a:avLst/>
+              </a:prstGeom>
+              <a:solidFill>
+                <a:schemeClr val="bg1"/>
+              </a:solidFill>
+              <a:ln>
+                <a:noFill/>
+              </a:ln>
+            </p:spPr>
+            <p:style>
+              <a:lnRef idx="2">
+                <a:schemeClr val="accent1">
+                  <a:shade val="50000"/>
+                </a:schemeClr>
+              </a:lnRef>
+              <a:fillRef idx="1">
+                <a:schemeClr val="accent1"/>
+              </a:fillRef>
+              <a:effectRef idx="0">
+                <a:schemeClr val="accent1"/>
+              </a:effectRef>
+              <a:fontRef idx="minor">
+                <a:schemeClr val="lt1"/>
+              </a:fontRef>
+            </p:style>
+            <p:txBody>
+              <a:bodyPr rtlCol="0" anchor="ctr"/>
+              <a:lstStyle/>
+              <a:p>
+                <a:pPr algn="ctr"/>
+                <a:endParaRPr kumimoji="1" lang="ja-JP" altLang="en-US"/>
+              </a:p>
+            </p:txBody>
+          </p:sp>
+          <p:sp>
+            <p:nvSpPr>
+              <p:cNvPr id="42" name="正方形/長方形 41">
+                <a:extLst>
+                  <a:ext uri="{FF2B5EF4-FFF2-40B4-BE49-F238E27FC236}">
+                    <a16:creationId xmlns:a16="http://schemas.microsoft.com/office/drawing/2014/main" id="{C908209D-2E7B-94AF-6FCC-0E0A73A779B8}"/>
+                  </a:ext>
+                </a:extLst>
+              </p:cNvPr>
+              <p:cNvSpPr/>
+              <p:nvPr/>
+            </p:nvSpPr>
+            <p:spPr>
+              <a:xfrm>
+                <a:off x="9693430" y="3149993"/>
+                <a:ext cx="424180" cy="261494"/>
+              </a:xfrm>
+              <a:prstGeom prst="rect">
+                <a:avLst/>
+              </a:prstGeom>
+              <a:solidFill>
+                <a:schemeClr val="bg1"/>
+              </a:solidFill>
+              <a:ln>
+                <a:noFill/>
+              </a:ln>
+            </p:spPr>
+            <p:style>
+              <a:lnRef idx="2">
+                <a:schemeClr val="accent1">
+                  <a:shade val="50000"/>
+                </a:schemeClr>
+              </a:lnRef>
+              <a:fillRef idx="1">
+                <a:schemeClr val="accent1"/>
+              </a:fillRef>
+              <a:effectRef idx="0">
+                <a:schemeClr val="accent1"/>
+              </a:effectRef>
+              <a:fontRef idx="minor">
+                <a:schemeClr val="lt1"/>
+              </a:fontRef>
+            </p:style>
+            <p:txBody>
+              <a:bodyPr rtlCol="0" anchor="ctr"/>
+              <a:lstStyle/>
+              <a:p>
+                <a:pPr algn="ctr"/>
+                <a:endParaRPr kumimoji="1" lang="ja-JP" altLang="en-US"/>
+              </a:p>
+            </p:txBody>
+          </p:sp>
+          <p:sp>
+            <p:nvSpPr>
+              <p:cNvPr id="44" name="楕円 43">
+                <a:extLst>
+                  <a:ext uri="{FF2B5EF4-FFF2-40B4-BE49-F238E27FC236}">
+                    <a16:creationId xmlns:a16="http://schemas.microsoft.com/office/drawing/2014/main" id="{6220B3DC-14AE-37C9-B07C-77486E803989}"/>
+                  </a:ext>
+                </a:extLst>
+              </p:cNvPr>
+              <p:cNvSpPr/>
+              <p:nvPr/>
+            </p:nvSpPr>
+            <p:spPr>
+              <a:xfrm>
+                <a:off x="9451754" y="2875989"/>
+                <a:ext cx="190909" cy="190909"/>
+              </a:xfrm>
+              <a:prstGeom prst="ellipse">
+                <a:avLst/>
+              </a:prstGeom>
+              <a:solidFill>
+                <a:schemeClr val="bg1"/>
+              </a:solidFill>
+              <a:ln>
+                <a:noFill/>
+              </a:ln>
+            </p:spPr>
+            <p:style>
+              <a:lnRef idx="2">
+                <a:schemeClr val="accent1">
+                  <a:shade val="50000"/>
+                </a:schemeClr>
+              </a:lnRef>
+              <a:fillRef idx="1">
+                <a:schemeClr val="accent1"/>
+              </a:fillRef>
+              <a:effectRef idx="0">
+                <a:schemeClr val="accent1"/>
+              </a:effectRef>
+              <a:fontRef idx="minor">
+                <a:schemeClr val="lt1"/>
+              </a:fontRef>
+            </p:style>
+            <p:txBody>
+              <a:bodyPr rtlCol="0" anchor="ctr"/>
+              <a:lstStyle/>
+              <a:p>
+                <a:pPr algn="ctr"/>
+                <a:endParaRPr kumimoji="1" lang="ja-JP" altLang="en-US"/>
+              </a:p>
+            </p:txBody>
+          </p:sp>
+          <p:sp>
+            <p:nvSpPr>
+              <p:cNvPr id="47" name="楕円 46">
+                <a:extLst>
+                  <a:ext uri="{FF2B5EF4-FFF2-40B4-BE49-F238E27FC236}">
+                    <a16:creationId xmlns:a16="http://schemas.microsoft.com/office/drawing/2014/main" id="{BBB5683B-8502-6A8B-0E85-B80E9DA9A70B}"/>
+                  </a:ext>
+                </a:extLst>
+              </p:cNvPr>
+              <p:cNvSpPr/>
+              <p:nvPr/>
+            </p:nvSpPr>
+            <p:spPr>
+              <a:xfrm>
+                <a:off x="10155228" y="2871686"/>
+                <a:ext cx="190909" cy="190909"/>
+              </a:xfrm>
+              <a:prstGeom prst="ellipse">
+                <a:avLst/>
+              </a:prstGeom>
+              <a:solidFill>
+                <a:schemeClr val="bg1"/>
+              </a:solidFill>
+              <a:ln>
+                <a:noFill/>
+              </a:ln>
+            </p:spPr>
+            <p:style>
+              <a:lnRef idx="2">
+                <a:schemeClr val="accent1">
+                  <a:shade val="50000"/>
+                </a:schemeClr>
+              </a:lnRef>
+              <a:fillRef idx="1">
+                <a:schemeClr val="accent1"/>
+              </a:fillRef>
+              <a:effectRef idx="0">
+                <a:schemeClr val="accent1"/>
+              </a:effectRef>
+              <a:fontRef idx="minor">
+                <a:schemeClr val="lt1"/>
+              </a:fontRef>
+            </p:style>
+            <p:txBody>
+              <a:bodyPr rtlCol="0" anchor="ctr"/>
+              <a:lstStyle/>
+              <a:p>
+                <a:pPr algn="ctr"/>
+                <a:endParaRPr kumimoji="1" lang="ja-JP" altLang="en-US"/>
+              </a:p>
+            </p:txBody>
+          </p:sp>
+          <p:cxnSp>
+            <p:nvCxnSpPr>
+              <p:cNvPr id="51" name="直線コネクタ 50">
+                <a:extLst>
+                  <a:ext uri="{FF2B5EF4-FFF2-40B4-BE49-F238E27FC236}">
+                    <a16:creationId xmlns:a16="http://schemas.microsoft.com/office/drawing/2014/main" id="{D25514B8-409F-C334-CD3A-966AFF733D79}"/>
+                  </a:ext>
+                </a:extLst>
+              </p:cNvPr>
+              <p:cNvCxnSpPr>
+                <a:cxnSpLocks/>
+              </p:cNvCxnSpPr>
+              <p:nvPr/>
+            </p:nvCxnSpPr>
+            <p:spPr>
+              <a:xfrm>
+                <a:off x="9716925" y="2611506"/>
+                <a:ext cx="377190" cy="0"/>
+              </a:xfrm>
+              <a:prstGeom prst="line">
+                <a:avLst/>
+              </a:prstGeom>
+              <a:ln w="19050">
+                <a:solidFill>
+                  <a:schemeClr val="tx1">
+                    <a:lumMod val="95000"/>
+                    <a:lumOff val="5000"/>
+                  </a:schemeClr>
+                </a:solidFill>
+              </a:ln>
+            </p:spPr>
+            <p:style>
+              <a:lnRef idx="1">
+                <a:schemeClr val="accent1"/>
+              </a:lnRef>
+              <a:fillRef idx="0">
+                <a:schemeClr val="accent1"/>
+              </a:fillRef>
+              <a:effectRef idx="0">
+                <a:schemeClr val="accent1"/>
+              </a:effectRef>
+              <a:fontRef idx="minor">
+                <a:schemeClr val="tx1"/>
+              </a:fontRef>
+            </p:style>
+          </p:cxnSp>
+          <p:sp>
+            <p:nvSpPr>
+              <p:cNvPr id="52" name="正方形/長方形 51">
+                <a:extLst>
+                  <a:ext uri="{FF2B5EF4-FFF2-40B4-BE49-F238E27FC236}">
+                    <a16:creationId xmlns:a16="http://schemas.microsoft.com/office/drawing/2014/main" id="{31B6A852-21F9-A672-8BFD-F35EA0596E6F}"/>
+                  </a:ext>
+                </a:extLst>
+              </p:cNvPr>
+              <p:cNvSpPr/>
+              <p:nvPr/>
+            </p:nvSpPr>
+            <p:spPr>
+              <a:xfrm>
+                <a:off x="9792174" y="3357241"/>
+                <a:ext cx="226692" cy="54513"/>
+              </a:xfrm>
+              <a:prstGeom prst="rect">
+                <a:avLst/>
+              </a:prstGeom>
+              <a:solidFill>
+                <a:schemeClr val="tx1">
+                  <a:lumMod val="65000"/>
+                  <a:lumOff val="35000"/>
+                </a:schemeClr>
+              </a:solidFill>
+              <a:ln w="28575">
+                <a:noFill/>
+              </a:ln>
+            </p:spPr>
+            <p:style>
+              <a:lnRef idx="2">
+                <a:schemeClr val="accent1">
+                  <a:shade val="50000"/>
+                </a:schemeClr>
+              </a:lnRef>
+              <a:fillRef idx="1">
+                <a:schemeClr val="accent1"/>
+              </a:fillRef>
+              <a:effectRef idx="0">
+                <a:schemeClr val="accent1"/>
+              </a:effectRef>
+              <a:fontRef idx="minor">
+                <a:schemeClr val="lt1"/>
+              </a:fontRef>
+            </p:style>
+            <p:txBody>
+              <a:bodyPr rtlCol="0" anchor="ctr"/>
+              <a:lstStyle/>
+              <a:p>
+                <a:pPr algn="ctr"/>
+                <a:endParaRPr kumimoji="1" lang="ja-JP" altLang="en-US"/>
+              </a:p>
+            </p:txBody>
+          </p:sp>
+          <p:sp>
+            <p:nvSpPr>
+              <p:cNvPr id="130" name="四角形: 上の 2 つの角を丸める 129">
+                <a:extLst>
+                  <a:ext uri="{FF2B5EF4-FFF2-40B4-BE49-F238E27FC236}">
+                    <a16:creationId xmlns:a16="http://schemas.microsoft.com/office/drawing/2014/main" id="{EA9D5D92-3537-32F4-2EB7-401202153576}"/>
+                  </a:ext>
+                </a:extLst>
+              </p:cNvPr>
+              <p:cNvSpPr/>
+              <p:nvPr/>
+            </p:nvSpPr>
+            <p:spPr>
+              <a:xfrm>
+                <a:off x="10239253" y="3194155"/>
+                <a:ext cx="51033" cy="217290"/>
+              </a:xfrm>
+              <a:prstGeom prst="round2SameRect">
+                <a:avLst>
+                  <a:gd name="adj1" fmla="val 50000"/>
+                  <a:gd name="adj2" fmla="val 0"/>
+                </a:avLst>
+              </a:prstGeom>
+              <a:solidFill>
+                <a:schemeClr val="bg1">
+                  <a:lumMod val="65000"/>
+                </a:schemeClr>
+              </a:solidFill>
+              <a:ln w="28575">
+                <a:noFill/>
+              </a:ln>
+            </p:spPr>
+            <p:style>
+              <a:lnRef idx="2">
+                <a:schemeClr val="accent1">
+                  <a:shade val="50000"/>
+                </a:schemeClr>
+              </a:lnRef>
+              <a:fillRef idx="1">
+                <a:schemeClr val="accent1"/>
+              </a:fillRef>
+              <a:effectRef idx="0">
+                <a:schemeClr val="accent1"/>
+              </a:effectRef>
+              <a:fontRef idx="minor">
+                <a:schemeClr val="lt1"/>
+              </a:fontRef>
+            </p:style>
+            <p:txBody>
+              <a:bodyPr rtlCol="0" anchor="ctr"/>
+              <a:lstStyle/>
+              <a:p>
+                <a:pPr algn="ctr"/>
+                <a:endParaRPr kumimoji="1" lang="ja-JP" altLang="en-US"/>
+              </a:p>
+            </p:txBody>
+          </p:sp>
+        </p:grpSp>
+        <p:sp>
+          <p:nvSpPr>
+            <p:cNvPr id="132" name="四角形: 上の 2 つの角を丸める 131">
+              <a:extLst>
+                <a:ext uri="{FF2B5EF4-FFF2-40B4-BE49-F238E27FC236}">
+                  <a16:creationId xmlns:a16="http://schemas.microsoft.com/office/drawing/2014/main" id="{5E8CBD20-C34D-C142-297B-ABB1CF0DB3F8}"/>
+                </a:ext>
+              </a:extLst>
+            </p:cNvPr>
+            <p:cNvSpPr/>
+            <p:nvPr/>
+          </p:nvSpPr>
+          <p:spPr>
+            <a:xfrm rot="18000000">
+              <a:off x="8894066" y="99822"/>
+              <a:ext cx="301859" cy="1507712"/>
+            </a:xfrm>
+            <a:prstGeom prst="round2SameRect">
+              <a:avLst>
+                <a:gd name="adj1" fmla="val 50000"/>
+                <a:gd name="adj2" fmla="val 0"/>
+              </a:avLst>
+            </a:prstGeom>
+            <a:solidFill>
+              <a:schemeClr val="tx1">
+                <a:lumMod val="85000"/>
+                <a:lumOff val="15000"/>
+              </a:schemeClr>
+            </a:solidFill>
+            <a:ln w="28575">
+              <a:noFill/>
+            </a:ln>
+          </p:spPr>
+          <p:style>
+            <a:lnRef idx="2">
+              <a:schemeClr val="accent1">
+                <a:shade val="50000"/>
+              </a:schemeClr>
+            </a:lnRef>
+            <a:fillRef idx="1">
+              <a:schemeClr val="accent1"/>
+            </a:fillRef>
+            <a:effectRef idx="0">
+              <a:schemeClr val="accent1"/>
+            </a:effectRef>
+            <a:fontRef idx="minor">
+              <a:schemeClr val="lt1"/>
+            </a:fontRef>
+          </p:style>
+          <p:txBody>
+            <a:bodyPr rtlCol="0" anchor="ctr"/>
+            <a:lstStyle/>
+            <a:p>
+              <a:pPr algn="ctr"/>
+              <a:endParaRPr kumimoji="1" lang="ja-JP" altLang="en-US"/>
+            </a:p>
+          </p:txBody>
+        </p:sp>
+        <p:sp>
+          <p:nvSpPr>
+            <p:cNvPr id="133" name="四角形: 上の 2 つの角を丸める 132">
+              <a:extLst>
+                <a:ext uri="{FF2B5EF4-FFF2-40B4-BE49-F238E27FC236}">
+                  <a16:creationId xmlns:a16="http://schemas.microsoft.com/office/drawing/2014/main" id="{086536D4-5D20-EE79-1D3D-6AE1BDECA26E}"/>
+                </a:ext>
+              </a:extLst>
+            </p:cNvPr>
+            <p:cNvSpPr/>
+            <p:nvPr/>
+          </p:nvSpPr>
+          <p:spPr>
+            <a:xfrm rot="3600000">
+              <a:off x="10278147" y="496054"/>
+              <a:ext cx="301859" cy="1032442"/>
+            </a:xfrm>
+            <a:prstGeom prst="round2SameRect">
+              <a:avLst>
+                <a:gd name="adj1" fmla="val 50000"/>
+                <a:gd name="adj2" fmla="val 0"/>
+              </a:avLst>
+            </a:prstGeom>
+            <a:solidFill>
+              <a:schemeClr val="tx1">
+                <a:lumMod val="85000"/>
+                <a:lumOff val="15000"/>
+              </a:schemeClr>
+            </a:solidFill>
+            <a:ln w="28575">
+              <a:noFill/>
+            </a:ln>
+          </p:spPr>
+          <p:style>
+            <a:lnRef idx="2">
+              <a:schemeClr val="accent1">
+                <a:shade val="50000"/>
+              </a:schemeClr>
+            </a:lnRef>
+            <a:fillRef idx="1">
+              <a:schemeClr val="accent1"/>
+            </a:fillRef>
+            <a:effectRef idx="0">
+              <a:schemeClr val="accent1"/>
+            </a:effectRef>
+            <a:fontRef idx="minor">
+              <a:schemeClr val="lt1"/>
+            </a:fontRef>
+          </p:style>
+          <p:txBody>
+            <a:bodyPr rtlCol="0" anchor="ctr"/>
+            <a:lstStyle/>
+            <a:p>
+              <a:pPr algn="ctr"/>
+              <a:endParaRPr kumimoji="1" lang="ja-JP" altLang="en-US"/>
+            </a:p>
+          </p:txBody>
+        </p:sp>
+        <p:sp>
+          <p:nvSpPr>
+            <p:cNvPr id="134" name="四角形: 上の 2 つの角を丸める 133">
+              <a:extLst>
+                <a:ext uri="{FF2B5EF4-FFF2-40B4-BE49-F238E27FC236}">
+                  <a16:creationId xmlns:a16="http://schemas.microsoft.com/office/drawing/2014/main" id="{9331ECA9-95DC-72F3-20BE-DFBB9864623D}"/>
+                </a:ext>
+              </a:extLst>
+            </p:cNvPr>
+            <p:cNvSpPr/>
+            <p:nvPr/>
+          </p:nvSpPr>
+          <p:spPr>
+            <a:xfrm>
+              <a:off x="9411441" y="1348091"/>
+              <a:ext cx="301859" cy="387141"/>
+            </a:xfrm>
+            <a:prstGeom prst="round2SameRect">
+              <a:avLst>
+                <a:gd name="adj1" fmla="val 0"/>
+                <a:gd name="adj2" fmla="val 0"/>
+              </a:avLst>
+            </a:prstGeom>
+            <a:solidFill>
+              <a:schemeClr val="tx1">
+                <a:lumMod val="85000"/>
+                <a:lumOff val="15000"/>
+              </a:schemeClr>
+            </a:solidFill>
+            <a:ln w="28575">
+              <a:noFill/>
+            </a:ln>
+          </p:spPr>
+          <p:style>
+            <a:lnRef idx="2">
+              <a:schemeClr val="accent1">
+                <a:shade val="50000"/>
+              </a:schemeClr>
+            </a:lnRef>
+            <a:fillRef idx="1">
+              <a:schemeClr val="accent1"/>
+            </a:fillRef>
+            <a:effectRef idx="0">
+              <a:schemeClr val="accent1"/>
+            </a:effectRef>
+            <a:fontRef idx="minor">
+              <a:schemeClr val="lt1"/>
+            </a:fontRef>
+          </p:style>
+          <p:txBody>
+            <a:bodyPr rtlCol="0" anchor="ctr"/>
+            <a:lstStyle/>
+            <a:p>
+              <a:pPr algn="ctr"/>
+              <a:endParaRPr kumimoji="1" lang="ja-JP" altLang="en-US"/>
+            </a:p>
+          </p:txBody>
+        </p:sp>
+        <p:sp>
+          <p:nvSpPr>
+            <p:cNvPr id="138" name="四角形: 上の 2 つの角を丸める 137">
+              <a:extLst>
+                <a:ext uri="{FF2B5EF4-FFF2-40B4-BE49-F238E27FC236}">
+                  <a16:creationId xmlns:a16="http://schemas.microsoft.com/office/drawing/2014/main" id="{C736BA97-D12F-B772-C0A7-E0816EF39652}"/>
+                </a:ext>
+              </a:extLst>
+            </p:cNvPr>
+            <p:cNvSpPr/>
+            <p:nvPr/>
+          </p:nvSpPr>
+          <p:spPr>
+            <a:xfrm>
+              <a:off x="9944897" y="1350087"/>
+              <a:ext cx="303956" cy="380792"/>
+            </a:xfrm>
+            <a:prstGeom prst="round2SameRect">
+              <a:avLst>
+                <a:gd name="adj1" fmla="val 0"/>
+                <a:gd name="adj2" fmla="val 0"/>
+              </a:avLst>
+            </a:prstGeom>
+            <a:solidFill>
+              <a:schemeClr val="tx1">
+                <a:lumMod val="85000"/>
+                <a:lumOff val="15000"/>
+              </a:schemeClr>
+            </a:solidFill>
+            <a:ln w="28575">
+              <a:noFill/>
+            </a:ln>
+          </p:spPr>
+          <p:style>
+            <a:lnRef idx="2">
+              <a:schemeClr val="accent1">
+                <a:shade val="50000"/>
+              </a:schemeClr>
+            </a:lnRef>
+            <a:fillRef idx="1">
+              <a:schemeClr val="accent1"/>
+            </a:fillRef>
+            <a:effectRef idx="0">
+              <a:schemeClr val="accent1"/>
+            </a:effectRef>
+            <a:fontRef idx="minor">
+              <a:schemeClr val="lt1"/>
+            </a:fontRef>
+          </p:style>
+          <p:txBody>
+            <a:bodyPr rtlCol="0" anchor="ctr"/>
+            <a:lstStyle/>
+            <a:p>
+              <a:pPr algn="ctr"/>
+              <a:endParaRPr kumimoji="1" lang="ja-JP" altLang="en-US"/>
+            </a:p>
+          </p:txBody>
+        </p:sp>
+        <p:sp>
+          <p:nvSpPr>
+            <p:cNvPr id="139" name="四角形: 上の 2 つの角を丸める 138">
+              <a:extLst>
+                <a:ext uri="{FF2B5EF4-FFF2-40B4-BE49-F238E27FC236}">
+                  <a16:creationId xmlns:a16="http://schemas.microsoft.com/office/drawing/2014/main" id="{74777B22-0E84-5466-8767-16D8D9DB788C}"/>
+                </a:ext>
+              </a:extLst>
+            </p:cNvPr>
+            <p:cNvSpPr/>
+            <p:nvPr/>
+          </p:nvSpPr>
+          <p:spPr>
+            <a:xfrm>
+              <a:off x="10029592" y="1228189"/>
+              <a:ext cx="150930" cy="243261"/>
+            </a:xfrm>
+            <a:prstGeom prst="round2SameRect">
+              <a:avLst>
+                <a:gd name="adj1" fmla="val 0"/>
+                <a:gd name="adj2" fmla="val 0"/>
+              </a:avLst>
+            </a:prstGeom>
+            <a:solidFill>
+              <a:schemeClr val="tx1">
+                <a:lumMod val="85000"/>
+                <a:lumOff val="15000"/>
+              </a:schemeClr>
+            </a:solidFill>
+            <a:ln w="28575">
+              <a:noFill/>
+            </a:ln>
+          </p:spPr>
+          <p:style>
+            <a:lnRef idx="2">
+              <a:schemeClr val="accent1">
+                <a:shade val="50000"/>
+              </a:schemeClr>
+            </a:lnRef>
+            <a:fillRef idx="1">
+              <a:schemeClr val="accent1"/>
+            </a:fillRef>
+            <a:effectRef idx="0">
+              <a:schemeClr val="accent1"/>
+            </a:effectRef>
+            <a:fontRef idx="minor">
+              <a:schemeClr val="lt1"/>
+            </a:fontRef>
+          </p:style>
+          <p:txBody>
+            <a:bodyPr rtlCol="0" anchor="ctr"/>
+            <a:lstStyle/>
+            <a:p>
+              <a:pPr algn="ctr"/>
+              <a:endParaRPr kumimoji="1" lang="ja-JP" altLang="en-US"/>
+            </a:p>
+          </p:txBody>
+        </p:sp>
+        <p:sp>
+          <p:nvSpPr>
+            <p:cNvPr id="140" name="四角形: 上の 2 つの角を丸める 139">
+              <a:extLst>
+                <a:ext uri="{FF2B5EF4-FFF2-40B4-BE49-F238E27FC236}">
+                  <a16:creationId xmlns:a16="http://schemas.microsoft.com/office/drawing/2014/main" id="{293CE68E-8674-9210-6034-4A3B12BB4901}"/>
+                </a:ext>
+              </a:extLst>
+            </p:cNvPr>
+            <p:cNvSpPr/>
+            <p:nvPr/>
+          </p:nvSpPr>
+          <p:spPr>
+            <a:xfrm>
+              <a:off x="9489157" y="1226193"/>
+              <a:ext cx="150930" cy="243261"/>
+            </a:xfrm>
+            <a:prstGeom prst="round2SameRect">
+              <a:avLst>
+                <a:gd name="adj1" fmla="val 0"/>
+                <a:gd name="adj2" fmla="val 0"/>
+              </a:avLst>
+            </a:prstGeom>
+            <a:solidFill>
+              <a:schemeClr val="tx1">
+                <a:lumMod val="85000"/>
+                <a:lumOff val="15000"/>
+              </a:schemeClr>
+            </a:solidFill>
+            <a:ln w="28575">
+              <a:noFill/>
+            </a:ln>
+          </p:spPr>
+          <p:style>
+            <a:lnRef idx="2">
+              <a:schemeClr val="accent1">
+                <a:shade val="50000"/>
+              </a:schemeClr>
+            </a:lnRef>
+            <a:fillRef idx="1">
+              <a:schemeClr val="accent1"/>
+            </a:fillRef>
+            <a:effectRef idx="0">
+              <a:schemeClr val="accent1"/>
+            </a:effectRef>
+            <a:fontRef idx="minor">
+              <a:schemeClr val="lt1"/>
+            </a:fontRef>
+          </p:style>
+          <p:txBody>
+            <a:bodyPr rtlCol="0" anchor="ctr"/>
+            <a:lstStyle/>
+            <a:p>
+              <a:pPr algn="ctr"/>
+              <a:endParaRPr kumimoji="1" lang="ja-JP" altLang="en-US"/>
+            </a:p>
+          </p:txBody>
+        </p:sp>
+        <p:sp>
+          <p:nvSpPr>
+            <p:cNvPr id="142" name="四角形: 上の 2 つの角を丸める 141">
+              <a:extLst>
+                <a:ext uri="{FF2B5EF4-FFF2-40B4-BE49-F238E27FC236}">
+                  <a16:creationId xmlns:a16="http://schemas.microsoft.com/office/drawing/2014/main" id="{B334B40C-A73B-B8A8-E778-369C77D0CE2C}"/>
+                </a:ext>
+              </a:extLst>
+            </p:cNvPr>
+            <p:cNvSpPr/>
+            <p:nvPr/>
+          </p:nvSpPr>
+          <p:spPr>
+            <a:xfrm>
+              <a:off x="9945946" y="1348090"/>
+              <a:ext cx="301859" cy="198455"/>
+            </a:xfrm>
+            <a:prstGeom prst="round2SameRect">
+              <a:avLst>
+                <a:gd name="adj1" fmla="val 0"/>
+                <a:gd name="adj2" fmla="val 0"/>
+              </a:avLst>
+            </a:prstGeom>
+            <a:solidFill>
+              <a:srgbClr val="D42A73"/>
+            </a:solidFill>
+            <a:ln w="28575">
+              <a:noFill/>
+            </a:ln>
+          </p:spPr>
+          <p:style>
+            <a:lnRef idx="2">
+              <a:schemeClr val="accent1">
+                <a:shade val="50000"/>
+              </a:schemeClr>
+            </a:lnRef>
+            <a:fillRef idx="1">
+              <a:schemeClr val="accent1"/>
+            </a:fillRef>
+            <a:effectRef idx="0">
+              <a:schemeClr val="accent1"/>
+            </a:effectRef>
+            <a:fontRef idx="minor">
+              <a:schemeClr val="lt1"/>
+            </a:fontRef>
+          </p:style>
+          <p:txBody>
+            <a:bodyPr rtlCol="0" anchor="ctr"/>
+            <a:lstStyle/>
+            <a:p>
+              <a:pPr algn="ctr"/>
+              <a:endParaRPr kumimoji="1" lang="ja-JP" altLang="en-US"/>
+            </a:p>
+          </p:txBody>
+        </p:sp>
+        <p:sp>
+          <p:nvSpPr>
+            <p:cNvPr id="143" name="四角形: 上の 2 つの角を丸める 142">
+              <a:extLst>
+                <a:ext uri="{FF2B5EF4-FFF2-40B4-BE49-F238E27FC236}">
+                  <a16:creationId xmlns:a16="http://schemas.microsoft.com/office/drawing/2014/main" id="{C2025E85-7830-67E2-D52E-12E6957B10C8}"/>
+                </a:ext>
+              </a:extLst>
+            </p:cNvPr>
+            <p:cNvSpPr/>
+            <p:nvPr/>
+          </p:nvSpPr>
+          <p:spPr>
+            <a:xfrm>
+              <a:off x="9411441" y="1348090"/>
+              <a:ext cx="301859" cy="198455"/>
+            </a:xfrm>
+            <a:prstGeom prst="round2SameRect">
+              <a:avLst>
+                <a:gd name="adj1" fmla="val 0"/>
+                <a:gd name="adj2" fmla="val 0"/>
+              </a:avLst>
+            </a:prstGeom>
+            <a:solidFill>
+              <a:srgbClr val="009FFF"/>
+            </a:solidFill>
+            <a:ln w="28575">
+              <a:noFill/>
+            </a:ln>
+          </p:spPr>
+          <p:style>
+            <a:lnRef idx="2">
+              <a:schemeClr val="accent1">
+                <a:shade val="50000"/>
+              </a:schemeClr>
+            </a:lnRef>
+            <a:fillRef idx="1">
+              <a:schemeClr val="accent1"/>
+            </a:fillRef>
+            <a:effectRef idx="0">
+              <a:schemeClr val="accent1"/>
+            </a:effectRef>
+            <a:fontRef idx="minor">
+              <a:schemeClr val="lt1"/>
+            </a:fontRef>
+          </p:style>
+          <p:txBody>
+            <a:bodyPr rtlCol="0" anchor="ctr"/>
+            <a:lstStyle/>
+            <a:p>
+              <a:pPr algn="ctr"/>
+              <a:endParaRPr kumimoji="1" lang="ja-JP" altLang="en-US"/>
+            </a:p>
+          </p:txBody>
+        </p:sp>
+      </p:grpSp>
     </p:spTree>
     <p:extLst>
       <p:ext uri="{BB962C8B-B14F-4D97-AF65-F5344CB8AC3E}">

--- a/assets/device_icons.pptx
+++ b/assets/device_icons.pptx
@@ -274,7 +274,7 @@
           <a:p>
             <a:fld id="{30D63992-91CA-41F7-A16C-71C1C327BEB8}" type="datetimeFigureOut">
               <a:rPr kumimoji="1" lang="ja-JP" altLang="en-US" smtClean="0"/>
-              <a:t>2026/6/11</a:t>
+              <a:t>2026/6/15</a:t>
             </a:fld>
             <a:endParaRPr kumimoji="1" lang="ja-JP" altLang="en-US"/>
           </a:p>
@@ -504,7 +504,7 @@
           <a:p>
             <a:fld id="{30D63992-91CA-41F7-A16C-71C1C327BEB8}" type="datetimeFigureOut">
               <a:rPr kumimoji="1" lang="ja-JP" altLang="en-US" smtClean="0"/>
-              <a:t>2026/6/11</a:t>
+              <a:t>2026/6/15</a:t>
             </a:fld>
             <a:endParaRPr kumimoji="1" lang="ja-JP" altLang="en-US"/>
           </a:p>
@@ -744,7 +744,7 @@
           <a:p>
             <a:fld id="{30D63992-91CA-41F7-A16C-71C1C327BEB8}" type="datetimeFigureOut">
               <a:rPr kumimoji="1" lang="ja-JP" altLang="en-US" smtClean="0"/>
-              <a:t>2026/6/11</a:t>
+              <a:t>2026/6/15</a:t>
             </a:fld>
             <a:endParaRPr kumimoji="1" lang="ja-JP" altLang="en-US"/>
           </a:p>
@@ -974,7 +974,7 @@
           <a:p>
             <a:fld id="{30D63992-91CA-41F7-A16C-71C1C327BEB8}" type="datetimeFigureOut">
               <a:rPr kumimoji="1" lang="ja-JP" altLang="en-US" smtClean="0"/>
-              <a:t>2026/6/11</a:t>
+              <a:t>2026/6/15</a:t>
             </a:fld>
             <a:endParaRPr kumimoji="1" lang="ja-JP" altLang="en-US"/>
           </a:p>
@@ -1249,7 +1249,7 @@
           <a:p>
             <a:fld id="{30D63992-91CA-41F7-A16C-71C1C327BEB8}" type="datetimeFigureOut">
               <a:rPr kumimoji="1" lang="ja-JP" altLang="en-US" smtClean="0"/>
-              <a:t>2026/6/11</a:t>
+              <a:t>2026/6/15</a:t>
             </a:fld>
             <a:endParaRPr kumimoji="1" lang="ja-JP" altLang="en-US"/>
           </a:p>
@@ -1578,7 +1578,7 @@
           <a:p>
             <a:fld id="{30D63992-91CA-41F7-A16C-71C1C327BEB8}" type="datetimeFigureOut">
               <a:rPr kumimoji="1" lang="ja-JP" altLang="en-US" smtClean="0"/>
-              <a:t>2026/6/11</a:t>
+              <a:t>2026/6/15</a:t>
             </a:fld>
             <a:endParaRPr kumimoji="1" lang="ja-JP" altLang="en-US"/>
           </a:p>
@@ -2054,7 +2054,7 @@
           <a:p>
             <a:fld id="{30D63992-91CA-41F7-A16C-71C1C327BEB8}" type="datetimeFigureOut">
               <a:rPr kumimoji="1" lang="ja-JP" altLang="en-US" smtClean="0"/>
-              <a:t>2026/6/11</a:t>
+              <a:t>2026/6/15</a:t>
             </a:fld>
             <a:endParaRPr kumimoji="1" lang="ja-JP" altLang="en-US"/>
           </a:p>
@@ -2195,7 +2195,7 @@
           <a:p>
             <a:fld id="{30D63992-91CA-41F7-A16C-71C1C327BEB8}" type="datetimeFigureOut">
               <a:rPr kumimoji="1" lang="ja-JP" altLang="en-US" smtClean="0"/>
-              <a:t>2026/6/11</a:t>
+              <a:t>2026/6/15</a:t>
             </a:fld>
             <a:endParaRPr kumimoji="1" lang="ja-JP" altLang="en-US"/>
           </a:p>
@@ -2308,7 +2308,7 @@
           <a:p>
             <a:fld id="{30D63992-91CA-41F7-A16C-71C1C327BEB8}" type="datetimeFigureOut">
               <a:rPr kumimoji="1" lang="ja-JP" altLang="en-US" smtClean="0"/>
-              <a:t>2026/6/11</a:t>
+              <a:t>2026/6/15</a:t>
             </a:fld>
             <a:endParaRPr kumimoji="1" lang="ja-JP" altLang="en-US"/>
           </a:p>
@@ -2651,7 +2651,7 @@
           <a:p>
             <a:fld id="{30D63992-91CA-41F7-A16C-71C1C327BEB8}" type="datetimeFigureOut">
               <a:rPr kumimoji="1" lang="ja-JP" altLang="en-US" smtClean="0"/>
-              <a:t>2026/6/11</a:t>
+              <a:t>2026/6/15</a:t>
             </a:fld>
             <a:endParaRPr kumimoji="1" lang="ja-JP" altLang="en-US"/>
           </a:p>
@@ -2939,7 +2939,7 @@
           <a:p>
             <a:fld id="{30D63992-91CA-41F7-A16C-71C1C327BEB8}" type="datetimeFigureOut">
               <a:rPr kumimoji="1" lang="ja-JP" altLang="en-US" smtClean="0"/>
-              <a:t>2026/6/11</a:t>
+              <a:t>2026/6/15</a:t>
             </a:fld>
             <a:endParaRPr kumimoji="1" lang="ja-JP" altLang="en-US"/>
           </a:p>
@@ -3212,7 +3212,7 @@
           <a:p>
             <a:fld id="{30D63992-91CA-41F7-A16C-71C1C327BEB8}" type="datetimeFigureOut">
               <a:rPr kumimoji="1" lang="ja-JP" altLang="en-US" smtClean="0"/>
-              <a:t>2026/6/11</a:t>
+              <a:t>2026/6/15</a:t>
             </a:fld>
             <a:endParaRPr kumimoji="1" lang="ja-JP" altLang="en-US"/>
           </a:p>
@@ -15007,7 +15007,9 @@
                 <a:avLst/>
               </a:prstGeom>
               <a:solidFill>
-                <a:schemeClr val="bg1"/>
+                <a:schemeClr val="bg2">
+                  <a:lumMod val="90000"/>
+                </a:schemeClr>
               </a:solidFill>
               <a:ln>
                 <a:noFill/>

--- a/assets/device_icons.pptx
+++ b/assets/device_icons.pptx
@@ -274,7 +274,7 @@
           <a:p>
             <a:fld id="{30D63992-91CA-41F7-A16C-71C1C327BEB8}" type="datetimeFigureOut">
               <a:rPr kumimoji="1" lang="ja-JP" altLang="en-US" smtClean="0"/>
-              <a:t>2026/6/15</a:t>
+              <a:t>2026/7/10</a:t>
             </a:fld>
             <a:endParaRPr kumimoji="1" lang="ja-JP" altLang="en-US"/>
           </a:p>
@@ -504,7 +504,7 @@
           <a:p>
             <a:fld id="{30D63992-91CA-41F7-A16C-71C1C327BEB8}" type="datetimeFigureOut">
               <a:rPr kumimoji="1" lang="ja-JP" altLang="en-US" smtClean="0"/>
-              <a:t>2026/6/15</a:t>
+              <a:t>2026/7/10</a:t>
             </a:fld>
             <a:endParaRPr kumimoji="1" lang="ja-JP" altLang="en-US"/>
           </a:p>
@@ -744,7 +744,7 @@
           <a:p>
             <a:fld id="{30D63992-91CA-41F7-A16C-71C1C327BEB8}" type="datetimeFigureOut">
               <a:rPr kumimoji="1" lang="ja-JP" altLang="en-US" smtClean="0"/>
-              <a:t>2026/6/15</a:t>
+              <a:t>2026/7/10</a:t>
             </a:fld>
             <a:endParaRPr kumimoji="1" lang="ja-JP" altLang="en-US"/>
           </a:p>
@@ -974,7 +974,7 @@
           <a:p>
             <a:fld id="{30D63992-91CA-41F7-A16C-71C1C327BEB8}" type="datetimeFigureOut">
               <a:rPr kumimoji="1" lang="ja-JP" altLang="en-US" smtClean="0"/>
-              <a:t>2026/6/15</a:t>
+              <a:t>2026/7/10</a:t>
             </a:fld>
             <a:endParaRPr kumimoji="1" lang="ja-JP" altLang="en-US"/>
           </a:p>
@@ -1249,7 +1249,7 @@
           <a:p>
             <a:fld id="{30D63992-91CA-41F7-A16C-71C1C327BEB8}" type="datetimeFigureOut">
               <a:rPr kumimoji="1" lang="ja-JP" altLang="en-US" smtClean="0"/>
-              <a:t>2026/6/15</a:t>
+              <a:t>2026/7/10</a:t>
             </a:fld>
             <a:endParaRPr kumimoji="1" lang="ja-JP" altLang="en-US"/>
           </a:p>
@@ -1578,7 +1578,7 @@
           <a:p>
             <a:fld id="{30D63992-91CA-41F7-A16C-71C1C327BEB8}" type="datetimeFigureOut">
               <a:rPr kumimoji="1" lang="ja-JP" altLang="en-US" smtClean="0"/>
-              <a:t>2026/6/15</a:t>
+              <a:t>2026/7/10</a:t>
             </a:fld>
             <a:endParaRPr kumimoji="1" lang="ja-JP" altLang="en-US"/>
           </a:p>
@@ -2054,7 +2054,7 @@
           <a:p>
             <a:fld id="{30D63992-91CA-41F7-A16C-71C1C327BEB8}" type="datetimeFigureOut">
               <a:rPr kumimoji="1" lang="ja-JP" altLang="en-US" smtClean="0"/>
-              <a:t>2026/6/15</a:t>
+              <a:t>2026/7/10</a:t>
             </a:fld>
             <a:endParaRPr kumimoji="1" lang="ja-JP" altLang="en-US"/>
           </a:p>
@@ -2195,7 +2195,7 @@
           <a:p>
             <a:fld id="{30D63992-91CA-41F7-A16C-71C1C327BEB8}" type="datetimeFigureOut">
               <a:rPr kumimoji="1" lang="ja-JP" altLang="en-US" smtClean="0"/>
-              <a:t>2026/6/15</a:t>
+              <a:t>2026/7/10</a:t>
             </a:fld>
             <a:endParaRPr kumimoji="1" lang="ja-JP" altLang="en-US"/>
           </a:p>
@@ -2308,7 +2308,7 @@
           <a:p>
             <a:fld id="{30D63992-91CA-41F7-A16C-71C1C327BEB8}" type="datetimeFigureOut">
               <a:rPr kumimoji="1" lang="ja-JP" altLang="en-US" smtClean="0"/>
-              <a:t>2026/6/15</a:t>
+              <a:t>2026/7/10</a:t>
             </a:fld>
             <a:endParaRPr kumimoji="1" lang="ja-JP" altLang="en-US"/>
           </a:p>
@@ -2651,7 +2651,7 @@
           <a:p>
             <a:fld id="{30D63992-91CA-41F7-A16C-71C1C327BEB8}" type="datetimeFigureOut">
               <a:rPr kumimoji="1" lang="ja-JP" altLang="en-US" smtClean="0"/>
-              <a:t>2026/6/15</a:t>
+              <a:t>2026/7/10</a:t>
             </a:fld>
             <a:endParaRPr kumimoji="1" lang="ja-JP" altLang="en-US"/>
           </a:p>
@@ -2939,7 +2939,7 @@
           <a:p>
             <a:fld id="{30D63992-91CA-41F7-A16C-71C1C327BEB8}" type="datetimeFigureOut">
               <a:rPr kumimoji="1" lang="ja-JP" altLang="en-US" smtClean="0"/>
-              <a:t>2026/6/15</a:t>
+              <a:t>2026/7/10</a:t>
             </a:fld>
             <a:endParaRPr kumimoji="1" lang="ja-JP" altLang="en-US"/>
           </a:p>
@@ -3212,7 +3212,7 @@
           <a:p>
             <a:fld id="{30D63992-91CA-41F7-A16C-71C1C327BEB8}" type="datetimeFigureOut">
               <a:rPr kumimoji="1" lang="ja-JP" altLang="en-US" smtClean="0"/>
-              <a:t>2026/6/15</a:t>
+              <a:t>2026/7/10</a:t>
             </a:fld>
             <a:endParaRPr kumimoji="1" lang="ja-JP" altLang="en-US"/>
           </a:p>
@@ -15814,6 +15814,769 @@
           </p:txBody>
         </p:sp>
       </p:grpSp>
+      <p:grpSp>
+        <p:nvGrpSpPr>
+          <p:cNvPr id="54" name="グループ化 53">
+            <a:extLst>
+              <a:ext uri="{FF2B5EF4-FFF2-40B4-BE49-F238E27FC236}">
+                <a16:creationId xmlns:a16="http://schemas.microsoft.com/office/drawing/2014/main" id="{E579328B-21A7-F998-4DC4-35EAC8AB06E5}"/>
+              </a:ext>
+            </a:extLst>
+          </p:cNvPr>
+          <p:cNvGrpSpPr/>
+          <p:nvPr/>
+        </p:nvGrpSpPr>
+        <p:grpSpPr>
+          <a:xfrm>
+            <a:off x="556642" y="2024025"/>
+            <a:ext cx="952500" cy="1905000"/>
+            <a:chOff x="713009" y="4555293"/>
+            <a:chExt cx="952500" cy="1905000"/>
+          </a:xfrm>
+        </p:grpSpPr>
+        <p:sp>
+          <p:nvSpPr>
+            <p:cNvPr id="38" name="四角形: 角を丸くする 37">
+              <a:extLst>
+                <a:ext uri="{FF2B5EF4-FFF2-40B4-BE49-F238E27FC236}">
+                  <a16:creationId xmlns:a16="http://schemas.microsoft.com/office/drawing/2014/main" id="{849EBE4D-DD3E-E2AB-07ED-4A6C53051CAB}"/>
+                </a:ext>
+              </a:extLst>
+            </p:cNvPr>
+            <p:cNvSpPr/>
+            <p:nvPr/>
+          </p:nvSpPr>
+          <p:spPr>
+            <a:xfrm>
+              <a:off x="713009" y="4555293"/>
+              <a:ext cx="952500" cy="1905000"/>
+            </a:xfrm>
+            <a:prstGeom prst="roundRect">
+              <a:avLst>
+                <a:gd name="adj" fmla="val 10000"/>
+              </a:avLst>
+            </a:prstGeom>
+            <a:solidFill>
+              <a:schemeClr val="bg1">
+                <a:lumMod val="50000"/>
+              </a:schemeClr>
+            </a:solidFill>
+            <a:ln w="12700">
+              <a:solidFill>
+                <a:schemeClr val="tx1">
+                  <a:lumMod val="65000"/>
+                  <a:lumOff val="35000"/>
+                </a:schemeClr>
+              </a:solidFill>
+            </a:ln>
+          </p:spPr>
+          <p:style>
+            <a:lnRef idx="2">
+              <a:schemeClr val="accent1">
+                <a:shade val="50000"/>
+              </a:schemeClr>
+            </a:lnRef>
+            <a:fillRef idx="1">
+              <a:schemeClr val="accent1"/>
+            </a:fillRef>
+            <a:effectRef idx="0">
+              <a:schemeClr val="accent1"/>
+            </a:effectRef>
+            <a:fontRef idx="minor">
+              <a:schemeClr val="lt1"/>
+            </a:fontRef>
+          </p:style>
+          <p:txBody>
+            <a:bodyPr rtlCol="0" anchor="ctr"/>
+            <a:lstStyle/>
+            <a:p>
+              <a:pPr algn="ctr"/>
+              <a:endParaRPr kumimoji="1" lang="ja-JP" altLang="en-US"/>
+            </a:p>
+          </p:txBody>
+        </p:sp>
+        <p:sp>
+          <p:nvSpPr>
+            <p:cNvPr id="41" name="正方形/長方形 40">
+              <a:extLst>
+                <a:ext uri="{FF2B5EF4-FFF2-40B4-BE49-F238E27FC236}">
+                  <a16:creationId xmlns:a16="http://schemas.microsoft.com/office/drawing/2014/main" id="{09525AB9-99CB-1DB3-989B-79FC257ACD1C}"/>
+                </a:ext>
+              </a:extLst>
+            </p:cNvPr>
+            <p:cNvSpPr/>
+            <p:nvPr/>
+          </p:nvSpPr>
+          <p:spPr>
+            <a:xfrm>
+              <a:off x="875505" y="4691092"/>
+              <a:ext cx="627509" cy="986649"/>
+            </a:xfrm>
+            <a:prstGeom prst="rect">
+              <a:avLst/>
+            </a:prstGeom>
+            <a:solidFill>
+              <a:schemeClr val="tx1">
+                <a:lumMod val="95000"/>
+                <a:lumOff val="5000"/>
+              </a:schemeClr>
+            </a:solidFill>
+            <a:ln>
+              <a:noFill/>
+            </a:ln>
+          </p:spPr>
+          <p:style>
+            <a:lnRef idx="2">
+              <a:schemeClr val="accent1">
+                <a:shade val="50000"/>
+              </a:schemeClr>
+            </a:lnRef>
+            <a:fillRef idx="1">
+              <a:schemeClr val="accent1"/>
+            </a:fillRef>
+            <a:effectRef idx="0">
+              <a:schemeClr val="accent1"/>
+            </a:effectRef>
+            <a:fontRef idx="minor">
+              <a:schemeClr val="lt1"/>
+            </a:fontRef>
+          </p:style>
+          <p:txBody>
+            <a:bodyPr rtlCol="0" anchor="ctr"/>
+            <a:lstStyle/>
+            <a:p>
+              <a:pPr algn="ctr"/>
+              <a:endParaRPr kumimoji="1" lang="ja-JP" altLang="en-US"/>
+            </a:p>
+          </p:txBody>
+        </p:sp>
+        <p:sp>
+          <p:nvSpPr>
+            <p:cNvPr id="43" name="四角形: 角を丸くする 42">
+              <a:extLst>
+                <a:ext uri="{FF2B5EF4-FFF2-40B4-BE49-F238E27FC236}">
+                  <a16:creationId xmlns:a16="http://schemas.microsoft.com/office/drawing/2014/main" id="{5AD2F559-5F40-8A9C-E467-14E93A2DC141}"/>
+                </a:ext>
+              </a:extLst>
+            </p:cNvPr>
+            <p:cNvSpPr/>
+            <p:nvPr/>
+          </p:nvSpPr>
+          <p:spPr>
+            <a:xfrm>
+              <a:off x="962670" y="5960268"/>
+              <a:ext cx="458574" cy="66178"/>
+            </a:xfrm>
+            <a:prstGeom prst="roundRect">
+              <a:avLst>
+                <a:gd name="adj" fmla="val 50000"/>
+              </a:avLst>
+            </a:prstGeom>
+            <a:solidFill>
+              <a:schemeClr val="accent1"/>
+            </a:solidFill>
+            <a:ln w="6350">
+              <a:solidFill>
+                <a:schemeClr val="accent1">
+                  <a:lumMod val="75000"/>
+                </a:schemeClr>
+              </a:solidFill>
+            </a:ln>
+          </p:spPr>
+          <p:style>
+            <a:lnRef idx="2">
+              <a:schemeClr val="accent1">
+                <a:shade val="50000"/>
+              </a:schemeClr>
+            </a:lnRef>
+            <a:fillRef idx="1">
+              <a:schemeClr val="accent1"/>
+            </a:fillRef>
+            <a:effectRef idx="0">
+              <a:schemeClr val="accent1"/>
+            </a:effectRef>
+            <a:fontRef idx="minor">
+              <a:schemeClr val="lt1"/>
+            </a:fontRef>
+          </p:style>
+          <p:txBody>
+            <a:bodyPr rtlCol="0" anchor="ctr"/>
+            <a:lstStyle/>
+            <a:p>
+              <a:pPr algn="ctr"/>
+              <a:endParaRPr kumimoji="1" lang="ja-JP" altLang="en-US"/>
+            </a:p>
+          </p:txBody>
+        </p:sp>
+        <p:sp>
+          <p:nvSpPr>
+            <p:cNvPr id="53" name="テキスト ボックス 52">
+              <a:extLst>
+                <a:ext uri="{FF2B5EF4-FFF2-40B4-BE49-F238E27FC236}">
+                  <a16:creationId xmlns:a16="http://schemas.microsoft.com/office/drawing/2014/main" id="{699CCAE0-41A1-8DDF-49B3-8BED3A67D59E}"/>
+                </a:ext>
+              </a:extLst>
+            </p:cNvPr>
+            <p:cNvSpPr txBox="1"/>
+            <p:nvPr/>
+          </p:nvSpPr>
+          <p:spPr>
+            <a:xfrm>
+              <a:off x="713009" y="4959314"/>
+              <a:ext cx="952500" cy="430887"/>
+            </a:xfrm>
+            <a:prstGeom prst="rect">
+              <a:avLst/>
+            </a:prstGeom>
+            <a:noFill/>
+          </p:spPr>
+          <p:txBody>
+            <a:bodyPr wrap="square" rtlCol="0">
+              <a:spAutoFit/>
+            </a:bodyPr>
+            <a:lstStyle/>
+            <a:p>
+              <a:pPr algn="ctr"/>
+              <a:r>
+                <a:rPr kumimoji="1" lang="en-US" altLang="ja-JP" sz="1100" b="1">
+                  <a:solidFill>
+                    <a:schemeClr val="bg1"/>
+                  </a:solidFill>
+                  <a:latin typeface="Arial" panose="020B0604020202020204" pitchFamily="34" charset="0"/>
+                  <a:cs typeface="Arial" panose="020B0604020202020204" pitchFamily="34" charset="0"/>
+                </a:rPr>
+                <a:t>M5Stack</a:t>
+              </a:r>
+              <a:br>
+                <a:rPr kumimoji="1" lang="en-US" altLang="ja-JP" sz="1100" b="1">
+                  <a:solidFill>
+                    <a:schemeClr val="bg1"/>
+                  </a:solidFill>
+                  <a:latin typeface="Arial" panose="020B0604020202020204" pitchFamily="34" charset="0"/>
+                  <a:cs typeface="Arial" panose="020B0604020202020204" pitchFamily="34" charset="0"/>
+                </a:rPr>
+              </a:br>
+              <a:r>
+                <a:rPr lang="en-US" altLang="ja-JP" sz="1100" b="1">
+                  <a:solidFill>
+                    <a:schemeClr val="bg1"/>
+                  </a:solidFill>
+                  <a:latin typeface="Arial" panose="020B0604020202020204" pitchFamily="34" charset="0"/>
+                  <a:cs typeface="Arial" panose="020B0604020202020204" pitchFamily="34" charset="0"/>
+                </a:rPr>
+                <a:t>Stick S3</a:t>
+              </a:r>
+              <a:endParaRPr kumimoji="1" lang="ja-JP" altLang="en-US" sz="1100" b="1" dirty="0">
+                <a:solidFill>
+                  <a:schemeClr val="bg1"/>
+                </a:solidFill>
+                <a:latin typeface="Arial" panose="020B0604020202020204" pitchFamily="34" charset="0"/>
+                <a:cs typeface="Arial" panose="020B0604020202020204" pitchFamily="34" charset="0"/>
+              </a:endParaRPr>
+            </a:p>
+          </p:txBody>
+        </p:sp>
+      </p:grpSp>
+      <p:grpSp>
+        <p:nvGrpSpPr>
+          <p:cNvPr id="168" name="グループ化 167">
+            <a:extLst>
+              <a:ext uri="{FF2B5EF4-FFF2-40B4-BE49-F238E27FC236}">
+                <a16:creationId xmlns:a16="http://schemas.microsoft.com/office/drawing/2014/main" id="{E00F0911-D779-B3AE-B2FC-B4428ECFC41B}"/>
+              </a:ext>
+            </a:extLst>
+          </p:cNvPr>
+          <p:cNvGrpSpPr/>
+          <p:nvPr/>
+        </p:nvGrpSpPr>
+        <p:grpSpPr>
+          <a:xfrm>
+            <a:off x="537643" y="4254519"/>
+            <a:ext cx="1158189" cy="1905000"/>
+            <a:chOff x="537643" y="4254519"/>
+            <a:chExt cx="1158189" cy="1905000"/>
+          </a:xfrm>
+        </p:grpSpPr>
+        <p:sp>
+          <p:nvSpPr>
+            <p:cNvPr id="156" name="四角形: 角を丸くする 155">
+              <a:extLst>
+                <a:ext uri="{FF2B5EF4-FFF2-40B4-BE49-F238E27FC236}">
+                  <a16:creationId xmlns:a16="http://schemas.microsoft.com/office/drawing/2014/main" id="{BD2DC23A-96E8-110A-ADDD-913248B34381}"/>
+                </a:ext>
+              </a:extLst>
+            </p:cNvPr>
+            <p:cNvSpPr/>
+            <p:nvPr/>
+          </p:nvSpPr>
+          <p:spPr>
+            <a:xfrm>
+              <a:off x="537643" y="4254519"/>
+              <a:ext cx="952500" cy="1905000"/>
+            </a:xfrm>
+            <a:prstGeom prst="roundRect">
+              <a:avLst>
+                <a:gd name="adj" fmla="val 10000"/>
+              </a:avLst>
+            </a:prstGeom>
+            <a:solidFill>
+              <a:schemeClr val="tx1"/>
+            </a:solidFill>
+            <a:ln w="28575">
+              <a:solidFill>
+                <a:schemeClr val="bg1">
+                  <a:lumMod val="50000"/>
+                </a:schemeClr>
+              </a:solidFill>
+            </a:ln>
+          </p:spPr>
+          <p:style>
+            <a:lnRef idx="2">
+              <a:schemeClr val="accent1">
+                <a:shade val="50000"/>
+              </a:schemeClr>
+            </a:lnRef>
+            <a:fillRef idx="1">
+              <a:schemeClr val="accent1"/>
+            </a:fillRef>
+            <a:effectRef idx="0">
+              <a:schemeClr val="accent1"/>
+            </a:effectRef>
+            <a:fontRef idx="minor">
+              <a:schemeClr val="lt1"/>
+            </a:fontRef>
+          </p:style>
+          <p:txBody>
+            <a:bodyPr rtlCol="0" anchor="ctr"/>
+            <a:lstStyle/>
+            <a:p>
+              <a:pPr algn="ctr"/>
+              <a:endParaRPr kumimoji="1" lang="ja-JP" altLang="en-US"/>
+            </a:p>
+          </p:txBody>
+        </p:sp>
+        <p:sp>
+          <p:nvSpPr>
+            <p:cNvPr id="158" name="正方形/長方形 157">
+              <a:extLst>
+                <a:ext uri="{FF2B5EF4-FFF2-40B4-BE49-F238E27FC236}">
+                  <a16:creationId xmlns:a16="http://schemas.microsoft.com/office/drawing/2014/main" id="{F2387E9B-AF23-1B3B-AB50-48E5818E5000}"/>
+                </a:ext>
+              </a:extLst>
+            </p:cNvPr>
+            <p:cNvSpPr/>
+            <p:nvPr/>
+          </p:nvSpPr>
+          <p:spPr>
+            <a:xfrm>
+              <a:off x="680721" y="4390318"/>
+              <a:ext cx="666346" cy="986649"/>
+            </a:xfrm>
+            <a:prstGeom prst="rect">
+              <a:avLst/>
+            </a:prstGeom>
+            <a:solidFill>
+              <a:schemeClr val="tx1">
+                <a:lumMod val="75000"/>
+                <a:lumOff val="25000"/>
+              </a:schemeClr>
+            </a:solidFill>
+            <a:ln>
+              <a:noFill/>
+            </a:ln>
+          </p:spPr>
+          <p:style>
+            <a:lnRef idx="2">
+              <a:schemeClr val="accent1">
+                <a:shade val="50000"/>
+              </a:schemeClr>
+            </a:lnRef>
+            <a:fillRef idx="1">
+              <a:schemeClr val="accent1"/>
+            </a:fillRef>
+            <a:effectRef idx="0">
+              <a:schemeClr val="accent1"/>
+            </a:effectRef>
+            <a:fontRef idx="minor">
+              <a:schemeClr val="lt1"/>
+            </a:fontRef>
+          </p:style>
+          <p:txBody>
+            <a:bodyPr rtlCol="0" anchor="ctr"/>
+            <a:lstStyle/>
+            <a:p>
+              <a:pPr algn="ctr"/>
+              <a:endParaRPr kumimoji="1" lang="ja-JP" altLang="en-US"/>
+            </a:p>
+          </p:txBody>
+        </p:sp>
+        <p:sp>
+          <p:nvSpPr>
+            <p:cNvPr id="159" name="四角形: 角を丸くする 158">
+              <a:extLst>
+                <a:ext uri="{FF2B5EF4-FFF2-40B4-BE49-F238E27FC236}">
+                  <a16:creationId xmlns:a16="http://schemas.microsoft.com/office/drawing/2014/main" id="{763CECED-3BF3-46DE-AEEF-925EEC81CC55}"/>
+                </a:ext>
+              </a:extLst>
+            </p:cNvPr>
+            <p:cNvSpPr/>
+            <p:nvPr/>
+          </p:nvSpPr>
+          <p:spPr>
+            <a:xfrm>
+              <a:off x="784606" y="5673462"/>
+              <a:ext cx="458574" cy="56092"/>
+            </a:xfrm>
+            <a:prstGeom prst="roundRect">
+              <a:avLst>
+                <a:gd name="adj" fmla="val 50000"/>
+              </a:avLst>
+            </a:prstGeom>
+            <a:solidFill>
+              <a:srgbClr val="C6E127"/>
+            </a:solidFill>
+            <a:ln w="6350">
+              <a:solidFill>
+                <a:srgbClr val="9AB018"/>
+              </a:solidFill>
+            </a:ln>
+          </p:spPr>
+          <p:style>
+            <a:lnRef idx="2">
+              <a:schemeClr val="accent1">
+                <a:shade val="50000"/>
+              </a:schemeClr>
+            </a:lnRef>
+            <a:fillRef idx="1">
+              <a:schemeClr val="accent1"/>
+            </a:fillRef>
+            <a:effectRef idx="0">
+              <a:schemeClr val="accent1"/>
+            </a:effectRef>
+            <a:fontRef idx="minor">
+              <a:schemeClr val="lt1"/>
+            </a:fontRef>
+          </p:style>
+          <p:txBody>
+            <a:bodyPr rtlCol="0" anchor="ctr"/>
+            <a:lstStyle/>
+            <a:p>
+              <a:pPr algn="ctr"/>
+              <a:endParaRPr kumimoji="1" lang="ja-JP" altLang="en-US"/>
+            </a:p>
+          </p:txBody>
+        </p:sp>
+        <p:sp>
+          <p:nvSpPr>
+            <p:cNvPr id="160" name="テキスト ボックス 159">
+              <a:extLst>
+                <a:ext uri="{FF2B5EF4-FFF2-40B4-BE49-F238E27FC236}">
+                  <a16:creationId xmlns:a16="http://schemas.microsoft.com/office/drawing/2014/main" id="{47EF2C57-CBDC-07CE-825A-047610834657}"/>
+                </a:ext>
+              </a:extLst>
+            </p:cNvPr>
+            <p:cNvSpPr txBox="1"/>
+            <p:nvPr/>
+          </p:nvSpPr>
+          <p:spPr>
+            <a:xfrm>
+              <a:off x="537643" y="4658540"/>
+              <a:ext cx="952500" cy="430887"/>
+            </a:xfrm>
+            <a:prstGeom prst="rect">
+              <a:avLst/>
+            </a:prstGeom>
+            <a:noFill/>
+          </p:spPr>
+          <p:txBody>
+            <a:bodyPr wrap="square" rtlCol="0">
+              <a:spAutoFit/>
+            </a:bodyPr>
+            <a:lstStyle/>
+            <a:p>
+              <a:pPr algn="ctr"/>
+              <a:r>
+                <a:rPr lang="en-US" altLang="ja-JP" sz="1050" b="1">
+                  <a:solidFill>
+                    <a:schemeClr val="bg1"/>
+                  </a:solidFill>
+                  <a:latin typeface="Arial" panose="020B0604020202020204" pitchFamily="34" charset="0"/>
+                  <a:cs typeface="Arial" panose="020B0604020202020204" pitchFamily="34" charset="0"/>
+                </a:rPr>
+                <a:t>Arduino</a:t>
+              </a:r>
+              <a:br>
+                <a:rPr kumimoji="1" lang="en-US" altLang="ja-JP" sz="1050" b="1">
+                  <a:solidFill>
+                    <a:schemeClr val="bg1"/>
+                  </a:solidFill>
+                  <a:latin typeface="Arial" panose="020B0604020202020204" pitchFamily="34" charset="0"/>
+                  <a:cs typeface="Arial" panose="020B0604020202020204" pitchFamily="34" charset="0"/>
+                </a:rPr>
+              </a:br>
+              <a:r>
+                <a:rPr kumimoji="1" lang="en-US" altLang="ja-JP" sz="1050" b="1">
+                  <a:solidFill>
+                    <a:schemeClr val="bg1"/>
+                  </a:solidFill>
+                  <a:latin typeface="Arial" panose="020B0604020202020204" pitchFamily="34" charset="0"/>
+                  <a:cs typeface="Arial" panose="020B0604020202020204" pitchFamily="34" charset="0"/>
+                </a:rPr>
+                <a:t>Nesso N1</a:t>
+              </a:r>
+              <a:endParaRPr kumimoji="1" lang="ja-JP" altLang="en-US" sz="1050" b="1" dirty="0">
+                <a:solidFill>
+                  <a:schemeClr val="bg1"/>
+                </a:solidFill>
+                <a:latin typeface="Arial" panose="020B0604020202020204" pitchFamily="34" charset="0"/>
+                <a:cs typeface="Arial" panose="020B0604020202020204" pitchFamily="34" charset="0"/>
+              </a:endParaRPr>
+            </a:p>
+          </p:txBody>
+        </p:sp>
+        <p:sp>
+          <p:nvSpPr>
+            <p:cNvPr id="161" name="四角形: 角を丸くする 160">
+              <a:extLst>
+                <a:ext uri="{FF2B5EF4-FFF2-40B4-BE49-F238E27FC236}">
+                  <a16:creationId xmlns:a16="http://schemas.microsoft.com/office/drawing/2014/main" id="{8FE4BE7D-3B83-9D9D-ABD9-E7CD064E42C4}"/>
+                </a:ext>
+              </a:extLst>
+            </p:cNvPr>
+            <p:cNvSpPr/>
+            <p:nvPr/>
+          </p:nvSpPr>
+          <p:spPr>
+            <a:xfrm>
+              <a:off x="1509142" y="4278630"/>
+              <a:ext cx="186690" cy="1813559"/>
+            </a:xfrm>
+            <a:prstGeom prst="roundRect">
+              <a:avLst>
+                <a:gd name="adj" fmla="val 12586"/>
+              </a:avLst>
+            </a:prstGeom>
+            <a:solidFill>
+              <a:schemeClr val="tx1">
+                <a:lumMod val="65000"/>
+                <a:lumOff val="35000"/>
+              </a:schemeClr>
+            </a:solidFill>
+            <a:ln w="9525">
+              <a:solidFill>
+                <a:schemeClr val="tx1">
+                  <a:lumMod val="75000"/>
+                  <a:lumOff val="25000"/>
+                </a:schemeClr>
+              </a:solidFill>
+            </a:ln>
+          </p:spPr>
+          <p:style>
+            <a:lnRef idx="2">
+              <a:schemeClr val="accent1">
+                <a:shade val="15000"/>
+              </a:schemeClr>
+            </a:lnRef>
+            <a:fillRef idx="1">
+              <a:schemeClr val="accent1"/>
+            </a:fillRef>
+            <a:effectRef idx="0">
+              <a:schemeClr val="accent1"/>
+            </a:effectRef>
+            <a:fontRef idx="minor">
+              <a:schemeClr val="lt1"/>
+            </a:fontRef>
+          </p:style>
+          <p:txBody>
+            <a:bodyPr rtlCol="0" anchor="ctr"/>
+            <a:lstStyle/>
+            <a:p>
+              <a:pPr algn="ctr"/>
+              <a:endParaRPr kumimoji="1" lang="ja-JP" altLang="en-US"/>
+            </a:p>
+          </p:txBody>
+        </p:sp>
+        <p:sp>
+          <p:nvSpPr>
+            <p:cNvPr id="165" name="正方形/長方形 164">
+              <a:extLst>
+                <a:ext uri="{FF2B5EF4-FFF2-40B4-BE49-F238E27FC236}">
+                  <a16:creationId xmlns:a16="http://schemas.microsoft.com/office/drawing/2014/main" id="{5F3E338E-4FCD-5B07-106B-6E24B95E17A7}"/>
+                </a:ext>
+              </a:extLst>
+            </p:cNvPr>
+            <p:cNvSpPr/>
+            <p:nvPr/>
+          </p:nvSpPr>
+          <p:spPr>
+            <a:xfrm>
+              <a:off x="1509198" y="4892694"/>
+              <a:ext cx="77667" cy="628650"/>
+            </a:xfrm>
+            <a:prstGeom prst="rect">
+              <a:avLst/>
+            </a:prstGeom>
+            <a:solidFill>
+              <a:schemeClr val="tx1">
+                <a:lumMod val="65000"/>
+                <a:lumOff val="35000"/>
+              </a:schemeClr>
+            </a:solidFill>
+            <a:ln w="6350">
+              <a:solidFill>
+                <a:schemeClr val="tx1">
+                  <a:lumMod val="75000"/>
+                  <a:lumOff val="25000"/>
+                </a:schemeClr>
+              </a:solidFill>
+            </a:ln>
+          </p:spPr>
+          <p:style>
+            <a:lnRef idx="2">
+              <a:schemeClr val="accent1">
+                <a:shade val="15000"/>
+              </a:schemeClr>
+            </a:lnRef>
+            <a:fillRef idx="1">
+              <a:schemeClr val="accent1"/>
+            </a:fillRef>
+            <a:effectRef idx="0">
+              <a:schemeClr val="accent1"/>
+            </a:effectRef>
+            <a:fontRef idx="minor">
+              <a:schemeClr val="lt1"/>
+            </a:fontRef>
+          </p:style>
+          <p:txBody>
+            <a:bodyPr rtlCol="0" anchor="ctr"/>
+            <a:lstStyle/>
+            <a:p>
+              <a:pPr algn="ctr"/>
+              <a:endParaRPr kumimoji="1" lang="ja-JP" altLang="en-US"/>
+            </a:p>
+          </p:txBody>
+        </p:sp>
+        <p:sp>
+          <p:nvSpPr>
+            <p:cNvPr id="166" name="正方形/長方形 165">
+              <a:extLst>
+                <a:ext uri="{FF2B5EF4-FFF2-40B4-BE49-F238E27FC236}">
+                  <a16:creationId xmlns:a16="http://schemas.microsoft.com/office/drawing/2014/main" id="{2AEACCF8-FB4B-0FA0-ED45-7FC2E4F24697}"/>
+                </a:ext>
+              </a:extLst>
+            </p:cNvPr>
+            <p:cNvSpPr/>
+            <p:nvPr/>
+          </p:nvSpPr>
+          <p:spPr>
+            <a:xfrm>
+              <a:off x="1509198" y="4278630"/>
+              <a:ext cx="77667" cy="418728"/>
+            </a:xfrm>
+            <a:prstGeom prst="rect">
+              <a:avLst/>
+            </a:prstGeom>
+            <a:solidFill>
+              <a:schemeClr val="tx1">
+                <a:lumMod val="65000"/>
+                <a:lumOff val="35000"/>
+              </a:schemeClr>
+            </a:solidFill>
+            <a:ln w="6350">
+              <a:solidFill>
+                <a:schemeClr val="tx1">
+                  <a:lumMod val="75000"/>
+                  <a:lumOff val="25000"/>
+                </a:schemeClr>
+              </a:solidFill>
+            </a:ln>
+          </p:spPr>
+          <p:style>
+            <a:lnRef idx="2">
+              <a:schemeClr val="accent1">
+                <a:shade val="15000"/>
+              </a:schemeClr>
+            </a:lnRef>
+            <a:fillRef idx="1">
+              <a:schemeClr val="accent1"/>
+            </a:fillRef>
+            <a:effectRef idx="0">
+              <a:schemeClr val="accent1"/>
+            </a:effectRef>
+            <a:fontRef idx="minor">
+              <a:schemeClr val="lt1"/>
+            </a:fontRef>
+          </p:style>
+          <p:txBody>
+            <a:bodyPr rtlCol="0" anchor="ctr"/>
+            <a:lstStyle/>
+            <a:p>
+              <a:pPr algn="ctr"/>
+              <a:endParaRPr kumimoji="1" lang="ja-JP" altLang="en-US"/>
+            </a:p>
+          </p:txBody>
+        </p:sp>
+        <p:sp>
+          <p:nvSpPr>
+            <p:cNvPr id="167" name="正方形/長方形 166">
+              <a:extLst>
+                <a:ext uri="{FF2B5EF4-FFF2-40B4-BE49-F238E27FC236}">
+                  <a16:creationId xmlns:a16="http://schemas.microsoft.com/office/drawing/2014/main" id="{3FB200A3-3834-D609-B15A-7FCBEA87A5F1}"/>
+                </a:ext>
+              </a:extLst>
+            </p:cNvPr>
+            <p:cNvSpPr/>
+            <p:nvPr/>
+          </p:nvSpPr>
+          <p:spPr>
+            <a:xfrm>
+              <a:off x="1509198" y="5673461"/>
+              <a:ext cx="77667" cy="418728"/>
+            </a:xfrm>
+            <a:prstGeom prst="rect">
+              <a:avLst/>
+            </a:prstGeom>
+            <a:solidFill>
+              <a:schemeClr val="tx1">
+                <a:lumMod val="65000"/>
+                <a:lumOff val="35000"/>
+              </a:schemeClr>
+            </a:solidFill>
+            <a:ln w="6350">
+              <a:solidFill>
+                <a:schemeClr val="tx1">
+                  <a:lumMod val="75000"/>
+                  <a:lumOff val="25000"/>
+                </a:schemeClr>
+              </a:solidFill>
+            </a:ln>
+          </p:spPr>
+          <p:style>
+            <a:lnRef idx="2">
+              <a:schemeClr val="accent1">
+                <a:shade val="15000"/>
+              </a:schemeClr>
+            </a:lnRef>
+            <a:fillRef idx="1">
+              <a:schemeClr val="accent1"/>
+            </a:fillRef>
+            <a:effectRef idx="0">
+              <a:schemeClr val="accent1"/>
+            </a:effectRef>
+            <a:fontRef idx="minor">
+              <a:schemeClr val="lt1"/>
+            </a:fontRef>
+          </p:style>
+          <p:txBody>
+            <a:bodyPr rtlCol="0" anchor="ctr"/>
+            <a:lstStyle/>
+            <a:p>
+              <a:pPr algn="ctr"/>
+              <a:endParaRPr kumimoji="1" lang="ja-JP" altLang="en-US"/>
+            </a:p>
+          </p:txBody>
+        </p:sp>
+      </p:grpSp>
     </p:spTree>
     <p:extLst>
       <p:ext uri="{BB962C8B-B14F-4D97-AF65-F5344CB8AC3E}">

--- a/assets/device_icons.pptx
+++ b/assets/device_icons.pptx
@@ -274,7 +274,7 @@
           <a:p>
             <a:fld id="{30D63992-91CA-41F7-A16C-71C1C327BEB8}" type="datetimeFigureOut">
               <a:rPr kumimoji="1" lang="ja-JP" altLang="en-US" smtClean="0"/>
-              <a:t>2026/7/10</a:t>
+              <a:t>2026/10/5</a:t>
             </a:fld>
             <a:endParaRPr kumimoji="1" lang="ja-JP" altLang="en-US"/>
           </a:p>
@@ -504,7 +504,7 @@
           <a:p>
             <a:fld id="{30D63992-91CA-41F7-A16C-71C1C327BEB8}" type="datetimeFigureOut">
               <a:rPr kumimoji="1" lang="ja-JP" altLang="en-US" smtClean="0"/>
-              <a:t>2026/7/10</a:t>
+              <a:t>2026/10/5</a:t>
             </a:fld>
             <a:endParaRPr kumimoji="1" lang="ja-JP" altLang="en-US"/>
           </a:p>
@@ -744,7 +744,7 @@
           <a:p>
             <a:fld id="{30D63992-91CA-41F7-A16C-71C1C327BEB8}" type="datetimeFigureOut">
               <a:rPr kumimoji="1" lang="ja-JP" altLang="en-US" smtClean="0"/>
-              <a:t>2026/7/10</a:t>
+              <a:t>2026/10/5</a:t>
             </a:fld>
             <a:endParaRPr kumimoji="1" lang="ja-JP" altLang="en-US"/>
           </a:p>
@@ -974,7 +974,7 @@
           <a:p>
             <a:fld id="{30D63992-91CA-41F7-A16C-71C1C327BEB8}" type="datetimeFigureOut">
               <a:rPr kumimoji="1" lang="ja-JP" altLang="en-US" smtClean="0"/>
-              <a:t>2026/7/10</a:t>
+              <a:t>2026/10/5</a:t>
             </a:fld>
             <a:endParaRPr kumimoji="1" lang="ja-JP" altLang="en-US"/>
           </a:p>
@@ -1249,7 +1249,7 @@
           <a:p>
             <a:fld id="{30D63992-91CA-41F7-A16C-71C1C327BEB8}" type="datetimeFigureOut">
               <a:rPr kumimoji="1" lang="ja-JP" altLang="en-US" smtClean="0"/>
-              <a:t>2026/7/10</a:t>
+              <a:t>2026/10/5</a:t>
             </a:fld>
             <a:endParaRPr kumimoji="1" lang="ja-JP" altLang="en-US"/>
           </a:p>
@@ -1578,7 +1578,7 @@
           <a:p>
             <a:fld id="{30D63992-91CA-41F7-A16C-71C1C327BEB8}" type="datetimeFigureOut">
               <a:rPr kumimoji="1" lang="ja-JP" altLang="en-US" smtClean="0"/>
-              <a:t>2026/7/10</a:t>
+              <a:t>2026/10/5</a:t>
             </a:fld>
             <a:endParaRPr kumimoji="1" lang="ja-JP" altLang="en-US"/>
           </a:p>
@@ -2054,7 +2054,7 @@
           <a:p>
             <a:fld id="{30D63992-91CA-41F7-A16C-71C1C327BEB8}" type="datetimeFigureOut">
               <a:rPr kumimoji="1" lang="ja-JP" altLang="en-US" smtClean="0"/>
-              <a:t>2026/7/10</a:t>
+              <a:t>2026/10/5</a:t>
             </a:fld>
             <a:endParaRPr kumimoji="1" lang="ja-JP" altLang="en-US"/>
           </a:p>
@@ -2195,7 +2195,7 @@
           <a:p>
             <a:fld id="{30D63992-91CA-41F7-A16C-71C1C327BEB8}" type="datetimeFigureOut">
               <a:rPr kumimoji="1" lang="ja-JP" altLang="en-US" smtClean="0"/>
-              <a:t>2026/7/10</a:t>
+              <a:t>2026/10/5</a:t>
             </a:fld>
             <a:endParaRPr kumimoji="1" lang="ja-JP" altLang="en-US"/>
           </a:p>
@@ -2308,7 +2308,7 @@
           <a:p>
             <a:fld id="{30D63992-91CA-41F7-A16C-71C1C327BEB8}" type="datetimeFigureOut">
               <a:rPr kumimoji="1" lang="ja-JP" altLang="en-US" smtClean="0"/>
-              <a:t>2026/7/10</a:t>
+              <a:t>2026/10/5</a:t>
             </a:fld>
             <a:endParaRPr kumimoji="1" lang="ja-JP" altLang="en-US"/>
           </a:p>
@@ -2651,7 +2651,7 @@
           <a:p>
             <a:fld id="{30D63992-91CA-41F7-A16C-71C1C327BEB8}" type="datetimeFigureOut">
               <a:rPr kumimoji="1" lang="ja-JP" altLang="en-US" smtClean="0"/>
-              <a:t>2026/7/10</a:t>
+              <a:t>2026/10/5</a:t>
             </a:fld>
             <a:endParaRPr kumimoji="1" lang="ja-JP" altLang="en-US"/>
           </a:p>
@@ -2939,7 +2939,7 @@
           <a:p>
             <a:fld id="{30D63992-91CA-41F7-A16C-71C1C327BEB8}" type="datetimeFigureOut">
               <a:rPr kumimoji="1" lang="ja-JP" altLang="en-US" smtClean="0"/>
-              <a:t>2026/7/10</a:t>
+              <a:t>2026/10/5</a:t>
             </a:fld>
             <a:endParaRPr kumimoji="1" lang="ja-JP" altLang="en-US"/>
           </a:p>
@@ -3212,7 +3212,7 @@
           <a:p>
             <a:fld id="{30D63992-91CA-41F7-A16C-71C1C327BEB8}" type="datetimeFigureOut">
               <a:rPr kumimoji="1" lang="ja-JP" altLang="en-US" smtClean="0"/>
-              <a:t>2026/7/10</a:t>
+              <a:t>2026/10/5</a:t>
             </a:fld>
             <a:endParaRPr kumimoji="1" lang="ja-JP" altLang="en-US"/>
           </a:p>
@@ -16577,6 +16577,1146 @@
           </p:txBody>
         </p:sp>
       </p:grpSp>
+      <p:grpSp>
+        <p:nvGrpSpPr>
+          <p:cNvPr id="178" name="グループ化 177">
+            <a:extLst>
+              <a:ext uri="{FF2B5EF4-FFF2-40B4-BE49-F238E27FC236}">
+                <a16:creationId xmlns:a16="http://schemas.microsoft.com/office/drawing/2014/main" id="{81318980-A66B-6952-5F45-FCF53CC052D6}"/>
+              </a:ext>
+            </a:extLst>
+          </p:cNvPr>
+          <p:cNvGrpSpPr/>
+          <p:nvPr/>
+        </p:nvGrpSpPr>
+        <p:grpSpPr>
+          <a:xfrm>
+            <a:off x="1895673" y="4232909"/>
+            <a:ext cx="1905000" cy="1905000"/>
+            <a:chOff x="1895673" y="4232909"/>
+            <a:chExt cx="1905000" cy="1905000"/>
+          </a:xfrm>
+        </p:grpSpPr>
+        <p:sp>
+          <p:nvSpPr>
+            <p:cNvPr id="171" name="四角形: 角を丸くする 170">
+              <a:extLst>
+                <a:ext uri="{FF2B5EF4-FFF2-40B4-BE49-F238E27FC236}">
+                  <a16:creationId xmlns:a16="http://schemas.microsoft.com/office/drawing/2014/main" id="{2408B335-83B7-BB87-2BC9-05B6B4BE06B9}"/>
+                </a:ext>
+              </a:extLst>
+            </p:cNvPr>
+            <p:cNvSpPr/>
+            <p:nvPr/>
+          </p:nvSpPr>
+          <p:spPr>
+            <a:xfrm>
+              <a:off x="1895673" y="4232909"/>
+              <a:ext cx="1905000" cy="1905000"/>
+            </a:xfrm>
+            <a:prstGeom prst="roundRect">
+              <a:avLst>
+                <a:gd name="adj" fmla="val 9514"/>
+              </a:avLst>
+            </a:prstGeom>
+            <a:solidFill>
+              <a:srgbClr val="000000"/>
+            </a:solidFill>
+            <a:ln w="38100">
+              <a:solidFill>
+                <a:srgbClr val="6C8987"/>
+              </a:solidFill>
+            </a:ln>
+          </p:spPr>
+          <p:style>
+            <a:lnRef idx="2">
+              <a:schemeClr val="accent1">
+                <a:shade val="50000"/>
+              </a:schemeClr>
+            </a:lnRef>
+            <a:fillRef idx="1">
+              <a:schemeClr val="accent1"/>
+            </a:fillRef>
+            <a:effectRef idx="0">
+              <a:schemeClr val="accent1"/>
+            </a:effectRef>
+            <a:fontRef idx="minor">
+              <a:schemeClr val="lt1"/>
+            </a:fontRef>
+          </p:style>
+          <p:txBody>
+            <a:bodyPr rtlCol="0" anchor="ctr"/>
+            <a:lstStyle/>
+            <a:p>
+              <a:pPr algn="ctr"/>
+              <a:endParaRPr kumimoji="1" lang="ja-JP" altLang="en-US"/>
+            </a:p>
+          </p:txBody>
+        </p:sp>
+        <p:sp>
+          <p:nvSpPr>
+            <p:cNvPr id="172" name="正方形/長方形 171">
+              <a:extLst>
+                <a:ext uri="{FF2B5EF4-FFF2-40B4-BE49-F238E27FC236}">
+                  <a16:creationId xmlns:a16="http://schemas.microsoft.com/office/drawing/2014/main" id="{8CE9D73A-23D0-000B-2C98-FBC9D2508CE1}"/>
+                </a:ext>
+              </a:extLst>
+            </p:cNvPr>
+            <p:cNvSpPr/>
+            <p:nvPr/>
+          </p:nvSpPr>
+          <p:spPr>
+            <a:xfrm>
+              <a:off x="2088907" y="4623590"/>
+              <a:ext cx="1513646" cy="1066800"/>
+            </a:xfrm>
+            <a:prstGeom prst="rect">
+              <a:avLst/>
+            </a:prstGeom>
+            <a:solidFill>
+              <a:schemeClr val="tx1">
+                <a:lumMod val="65000"/>
+                <a:lumOff val="35000"/>
+              </a:schemeClr>
+            </a:solidFill>
+            <a:ln>
+              <a:noFill/>
+            </a:ln>
+          </p:spPr>
+          <p:style>
+            <a:lnRef idx="2">
+              <a:schemeClr val="accent1">
+                <a:shade val="50000"/>
+              </a:schemeClr>
+            </a:lnRef>
+            <a:fillRef idx="1">
+              <a:schemeClr val="accent1"/>
+            </a:fillRef>
+            <a:effectRef idx="0">
+              <a:schemeClr val="accent1"/>
+            </a:effectRef>
+            <a:fontRef idx="minor">
+              <a:schemeClr val="lt1"/>
+            </a:fontRef>
+          </p:style>
+          <p:txBody>
+            <a:bodyPr rtlCol="0" anchor="ctr"/>
+            <a:lstStyle/>
+            <a:p>
+              <a:pPr algn="ctr"/>
+              <a:endParaRPr kumimoji="1" lang="ja-JP" altLang="en-US"/>
+            </a:p>
+          </p:txBody>
+        </p:sp>
+        <p:sp>
+          <p:nvSpPr>
+            <p:cNvPr id="173" name="テキスト ボックス 172">
+              <a:extLst>
+                <a:ext uri="{FF2B5EF4-FFF2-40B4-BE49-F238E27FC236}">
+                  <a16:creationId xmlns:a16="http://schemas.microsoft.com/office/drawing/2014/main" id="{14579AFD-3C67-AE4D-4286-185FC9872824}"/>
+                </a:ext>
+              </a:extLst>
+            </p:cNvPr>
+            <p:cNvSpPr txBox="1"/>
+            <p:nvPr/>
+          </p:nvSpPr>
+          <p:spPr>
+            <a:xfrm>
+              <a:off x="1930917" y="4813398"/>
+              <a:ext cx="1829626" cy="646331"/>
+            </a:xfrm>
+            <a:prstGeom prst="rect">
+              <a:avLst/>
+            </a:prstGeom>
+            <a:noFill/>
+          </p:spPr>
+          <p:txBody>
+            <a:bodyPr wrap="square" rtlCol="0">
+              <a:spAutoFit/>
+            </a:bodyPr>
+            <a:lstStyle/>
+            <a:p>
+              <a:pPr algn="ctr"/>
+              <a:r>
+                <a:rPr kumimoji="1" lang="en-US" altLang="ja-JP" b="1" dirty="0">
+                  <a:solidFill>
+                    <a:schemeClr val="bg1"/>
+                  </a:solidFill>
+                  <a:latin typeface="Arial" panose="020B0604020202020204" pitchFamily="34" charset="0"/>
+                  <a:cs typeface="Arial" panose="020B0604020202020204" pitchFamily="34" charset="0"/>
+                </a:rPr>
+                <a:t>M5Stack</a:t>
+              </a:r>
+              <a:br>
+                <a:rPr kumimoji="1" lang="en-US" altLang="ja-JP" b="1">
+                  <a:solidFill>
+                    <a:schemeClr val="bg1"/>
+                  </a:solidFill>
+                  <a:latin typeface="Arial" panose="020B0604020202020204" pitchFamily="34" charset="0"/>
+                  <a:cs typeface="Arial" panose="020B0604020202020204" pitchFamily="34" charset="0"/>
+                </a:rPr>
+              </a:br>
+              <a:r>
+                <a:rPr kumimoji="1" lang="en-US" altLang="ja-JP" b="1">
+                  <a:solidFill>
+                    <a:schemeClr val="bg1"/>
+                  </a:solidFill>
+                  <a:latin typeface="Arial" panose="020B0604020202020204" pitchFamily="34" charset="0"/>
+                  <a:cs typeface="Arial" panose="020B0604020202020204" pitchFamily="34" charset="0"/>
+                </a:rPr>
+                <a:t>CoreS3</a:t>
+              </a:r>
+              <a:r>
+                <a:rPr lang="ja-JP" altLang="en-US" b="1">
+                  <a:solidFill>
+                    <a:schemeClr val="bg1"/>
+                  </a:solidFill>
+                  <a:latin typeface="Arial" panose="020B0604020202020204" pitchFamily="34" charset="0"/>
+                  <a:cs typeface="Arial" panose="020B0604020202020204" pitchFamily="34" charset="0"/>
+                </a:rPr>
+                <a:t> </a:t>
+              </a:r>
+              <a:r>
+                <a:rPr lang="en-US" altLang="ja-JP" b="1">
+                  <a:solidFill>
+                    <a:schemeClr val="bg1"/>
+                  </a:solidFill>
+                  <a:latin typeface="Arial" panose="020B0604020202020204" pitchFamily="34" charset="0"/>
+                  <a:cs typeface="Arial" panose="020B0604020202020204" pitchFamily="34" charset="0"/>
+                </a:rPr>
+                <a:t>Lite</a:t>
+              </a:r>
+              <a:endParaRPr kumimoji="1" lang="ja-JP" altLang="en-US" b="1" dirty="0">
+                <a:solidFill>
+                  <a:schemeClr val="bg1"/>
+                </a:solidFill>
+                <a:latin typeface="Arial" panose="020B0604020202020204" pitchFamily="34" charset="0"/>
+                <a:cs typeface="Arial" panose="020B0604020202020204" pitchFamily="34" charset="0"/>
+              </a:endParaRPr>
+            </a:p>
+          </p:txBody>
+        </p:sp>
+        <p:sp>
+          <p:nvSpPr>
+            <p:cNvPr id="174" name="楕円 173">
+              <a:extLst>
+                <a:ext uri="{FF2B5EF4-FFF2-40B4-BE49-F238E27FC236}">
+                  <a16:creationId xmlns:a16="http://schemas.microsoft.com/office/drawing/2014/main" id="{47C377D1-B1BC-0AD6-BF9E-043B5A3EA694}"/>
+                </a:ext>
+              </a:extLst>
+            </p:cNvPr>
+            <p:cNvSpPr/>
+            <p:nvPr/>
+          </p:nvSpPr>
+          <p:spPr>
+            <a:xfrm>
+              <a:off x="2760657" y="5829463"/>
+              <a:ext cx="169372" cy="169372"/>
+            </a:xfrm>
+            <a:prstGeom prst="ellipse">
+              <a:avLst/>
+            </a:prstGeom>
+            <a:noFill/>
+            <a:ln>
+              <a:solidFill>
+                <a:schemeClr val="accent2"/>
+              </a:solidFill>
+            </a:ln>
+          </p:spPr>
+          <p:style>
+            <a:lnRef idx="2">
+              <a:schemeClr val="accent1">
+                <a:shade val="50000"/>
+              </a:schemeClr>
+            </a:lnRef>
+            <a:fillRef idx="1">
+              <a:schemeClr val="accent1"/>
+            </a:fillRef>
+            <a:effectRef idx="0">
+              <a:schemeClr val="accent1"/>
+            </a:effectRef>
+            <a:fontRef idx="minor">
+              <a:schemeClr val="lt1"/>
+            </a:fontRef>
+          </p:style>
+          <p:txBody>
+            <a:bodyPr rtlCol="0" anchor="ctr"/>
+            <a:lstStyle/>
+            <a:p>
+              <a:pPr algn="ctr"/>
+              <a:endParaRPr kumimoji="1" lang="ja-JP" altLang="en-US"/>
+            </a:p>
+          </p:txBody>
+        </p:sp>
+        <p:sp>
+          <p:nvSpPr>
+            <p:cNvPr id="175" name="楕円 174">
+              <a:extLst>
+                <a:ext uri="{FF2B5EF4-FFF2-40B4-BE49-F238E27FC236}">
+                  <a16:creationId xmlns:a16="http://schemas.microsoft.com/office/drawing/2014/main" id="{D29137E6-6A1C-7CB0-13C7-68C03894175A}"/>
+                </a:ext>
+              </a:extLst>
+            </p:cNvPr>
+            <p:cNvSpPr/>
+            <p:nvPr/>
+          </p:nvSpPr>
+          <p:spPr>
+            <a:xfrm>
+              <a:off x="2801586" y="5870392"/>
+              <a:ext cx="87515" cy="87515"/>
+            </a:xfrm>
+            <a:prstGeom prst="ellipse">
+              <a:avLst/>
+            </a:prstGeom>
+            <a:solidFill>
+              <a:srgbClr val="3B4451"/>
+            </a:solidFill>
+            <a:ln>
+              <a:noFill/>
+            </a:ln>
+          </p:spPr>
+          <p:style>
+            <a:lnRef idx="2">
+              <a:schemeClr val="accent1">
+                <a:shade val="50000"/>
+              </a:schemeClr>
+            </a:lnRef>
+            <a:fillRef idx="1">
+              <a:schemeClr val="accent1"/>
+            </a:fillRef>
+            <a:effectRef idx="0">
+              <a:schemeClr val="accent1"/>
+            </a:effectRef>
+            <a:fontRef idx="minor">
+              <a:schemeClr val="lt1"/>
+            </a:fontRef>
+          </p:style>
+          <p:txBody>
+            <a:bodyPr rtlCol="0" anchor="ctr"/>
+            <a:lstStyle/>
+            <a:p>
+              <a:pPr algn="ctr"/>
+              <a:endParaRPr kumimoji="1" lang="ja-JP" altLang="en-US"/>
+            </a:p>
+          </p:txBody>
+        </p:sp>
+        <p:sp>
+          <p:nvSpPr>
+            <p:cNvPr id="176" name="楕円 175">
+              <a:extLst>
+                <a:ext uri="{FF2B5EF4-FFF2-40B4-BE49-F238E27FC236}">
+                  <a16:creationId xmlns:a16="http://schemas.microsoft.com/office/drawing/2014/main" id="{1D23325C-0275-BB7F-308A-6EC087525549}"/>
+                </a:ext>
+              </a:extLst>
+            </p:cNvPr>
+            <p:cNvSpPr/>
+            <p:nvPr/>
+          </p:nvSpPr>
+          <p:spPr>
+            <a:xfrm>
+              <a:off x="3084811" y="5888996"/>
+              <a:ext cx="45719" cy="45719"/>
+            </a:xfrm>
+            <a:prstGeom prst="ellipse">
+              <a:avLst/>
+            </a:prstGeom>
+            <a:solidFill>
+              <a:schemeClr val="bg1">
+                <a:lumMod val="65000"/>
+              </a:schemeClr>
+            </a:solidFill>
+            <a:ln>
+              <a:noFill/>
+            </a:ln>
+          </p:spPr>
+          <p:style>
+            <a:lnRef idx="2">
+              <a:schemeClr val="accent1">
+                <a:shade val="50000"/>
+              </a:schemeClr>
+            </a:lnRef>
+            <a:fillRef idx="1">
+              <a:schemeClr val="accent1"/>
+            </a:fillRef>
+            <a:effectRef idx="0">
+              <a:schemeClr val="accent1"/>
+            </a:effectRef>
+            <a:fontRef idx="minor">
+              <a:schemeClr val="lt1"/>
+            </a:fontRef>
+          </p:style>
+          <p:txBody>
+            <a:bodyPr rtlCol="0" anchor="ctr"/>
+            <a:lstStyle/>
+            <a:p>
+              <a:pPr algn="ctr"/>
+              <a:endParaRPr kumimoji="1" lang="ja-JP" altLang="en-US"/>
+            </a:p>
+          </p:txBody>
+        </p:sp>
+        <p:sp>
+          <p:nvSpPr>
+            <p:cNvPr id="177" name="楕円 176">
+              <a:extLst>
+                <a:ext uri="{FF2B5EF4-FFF2-40B4-BE49-F238E27FC236}">
+                  <a16:creationId xmlns:a16="http://schemas.microsoft.com/office/drawing/2014/main" id="{098957A3-DAF7-BF43-80C0-C5E2CA215E1B}"/>
+                </a:ext>
+              </a:extLst>
+            </p:cNvPr>
+            <p:cNvSpPr/>
+            <p:nvPr/>
+          </p:nvSpPr>
+          <p:spPr>
+            <a:xfrm>
+              <a:off x="3187740" y="5888996"/>
+              <a:ext cx="45719" cy="45719"/>
+            </a:xfrm>
+            <a:prstGeom prst="ellipse">
+              <a:avLst/>
+            </a:prstGeom>
+            <a:solidFill>
+              <a:schemeClr val="bg1">
+                <a:lumMod val="65000"/>
+              </a:schemeClr>
+            </a:solidFill>
+            <a:ln>
+              <a:noFill/>
+            </a:ln>
+          </p:spPr>
+          <p:style>
+            <a:lnRef idx="2">
+              <a:schemeClr val="accent1">
+                <a:shade val="50000"/>
+              </a:schemeClr>
+            </a:lnRef>
+            <a:fillRef idx="1">
+              <a:schemeClr val="accent1"/>
+            </a:fillRef>
+            <a:effectRef idx="0">
+              <a:schemeClr val="accent1"/>
+            </a:effectRef>
+            <a:fontRef idx="minor">
+              <a:schemeClr val="lt1"/>
+            </a:fontRef>
+          </p:style>
+          <p:txBody>
+            <a:bodyPr rtlCol="0" anchor="ctr"/>
+            <a:lstStyle/>
+            <a:p>
+              <a:pPr algn="ctr"/>
+              <a:endParaRPr kumimoji="1" lang="ja-JP" altLang="en-US"/>
+            </a:p>
+          </p:txBody>
+        </p:sp>
+      </p:grpSp>
+      <p:grpSp>
+        <p:nvGrpSpPr>
+          <p:cNvPr id="196" name="グループ化 195">
+            <a:extLst>
+              <a:ext uri="{FF2B5EF4-FFF2-40B4-BE49-F238E27FC236}">
+                <a16:creationId xmlns:a16="http://schemas.microsoft.com/office/drawing/2014/main" id="{3FD327F3-5DCF-7876-8933-8D163713E969}"/>
+              </a:ext>
+            </a:extLst>
+          </p:cNvPr>
+          <p:cNvGrpSpPr/>
+          <p:nvPr/>
+        </p:nvGrpSpPr>
+        <p:grpSpPr>
+          <a:xfrm>
+            <a:off x="4212282" y="2588062"/>
+            <a:ext cx="952503" cy="1905000"/>
+            <a:chOff x="4212282" y="2588062"/>
+            <a:chExt cx="952503" cy="1905000"/>
+          </a:xfrm>
+        </p:grpSpPr>
+        <p:sp>
+          <p:nvSpPr>
+            <p:cNvPr id="180" name="四角形: 角を丸くする 179">
+              <a:extLst>
+                <a:ext uri="{FF2B5EF4-FFF2-40B4-BE49-F238E27FC236}">
+                  <a16:creationId xmlns:a16="http://schemas.microsoft.com/office/drawing/2014/main" id="{B80DC28F-2867-B790-C986-3B80B0D2BD07}"/>
+                </a:ext>
+              </a:extLst>
+            </p:cNvPr>
+            <p:cNvSpPr/>
+            <p:nvPr/>
+          </p:nvSpPr>
+          <p:spPr>
+            <a:xfrm>
+              <a:off x="4212285" y="2588062"/>
+              <a:ext cx="952500" cy="1905000"/>
+            </a:xfrm>
+            <a:prstGeom prst="roundRect">
+              <a:avLst>
+                <a:gd name="adj" fmla="val 10000"/>
+              </a:avLst>
+            </a:prstGeom>
+            <a:solidFill>
+              <a:schemeClr val="accent2">
+                <a:lumMod val="50000"/>
+              </a:schemeClr>
+            </a:solidFill>
+            <a:ln w="28575">
+              <a:solidFill>
+                <a:schemeClr val="accent2">
+                  <a:lumMod val="75000"/>
+                </a:schemeClr>
+              </a:solidFill>
+            </a:ln>
+          </p:spPr>
+          <p:style>
+            <a:lnRef idx="2">
+              <a:schemeClr val="accent1">
+                <a:shade val="50000"/>
+              </a:schemeClr>
+            </a:lnRef>
+            <a:fillRef idx="1">
+              <a:schemeClr val="accent1"/>
+            </a:fillRef>
+            <a:effectRef idx="0">
+              <a:schemeClr val="accent1"/>
+            </a:effectRef>
+            <a:fontRef idx="minor">
+              <a:schemeClr val="lt1"/>
+            </a:fontRef>
+          </p:style>
+          <p:txBody>
+            <a:bodyPr rtlCol="0" anchor="ctr"/>
+            <a:lstStyle/>
+            <a:p>
+              <a:pPr algn="ctr"/>
+              <a:endParaRPr kumimoji="1" lang="ja-JP" altLang="en-US"/>
+            </a:p>
+          </p:txBody>
+        </p:sp>
+        <p:sp>
+          <p:nvSpPr>
+            <p:cNvPr id="182" name="四角形: 角を丸くする 181">
+              <a:extLst>
+                <a:ext uri="{FF2B5EF4-FFF2-40B4-BE49-F238E27FC236}">
+                  <a16:creationId xmlns:a16="http://schemas.microsoft.com/office/drawing/2014/main" id="{6E91D754-0D23-A6B5-C476-CED375825B25}"/>
+                </a:ext>
+              </a:extLst>
+            </p:cNvPr>
+            <p:cNvSpPr/>
+            <p:nvPr/>
+          </p:nvSpPr>
+          <p:spPr>
+            <a:xfrm>
+              <a:off x="4404181" y="3926409"/>
+              <a:ext cx="568705" cy="415925"/>
+            </a:xfrm>
+            <a:prstGeom prst="roundRect">
+              <a:avLst/>
+            </a:prstGeom>
+            <a:solidFill>
+              <a:schemeClr val="accent2">
+                <a:lumMod val="50000"/>
+              </a:schemeClr>
+            </a:solidFill>
+            <a:ln>
+              <a:solidFill>
+                <a:schemeClr val="tx1">
+                  <a:lumMod val="75000"/>
+                  <a:lumOff val="25000"/>
+                </a:schemeClr>
+              </a:solidFill>
+            </a:ln>
+          </p:spPr>
+          <p:style>
+            <a:lnRef idx="2">
+              <a:schemeClr val="accent1">
+                <a:shade val="50000"/>
+              </a:schemeClr>
+            </a:lnRef>
+            <a:fillRef idx="1">
+              <a:schemeClr val="accent1"/>
+            </a:fillRef>
+            <a:effectRef idx="0">
+              <a:schemeClr val="accent1"/>
+            </a:effectRef>
+            <a:fontRef idx="minor">
+              <a:schemeClr val="lt1"/>
+            </a:fontRef>
+          </p:style>
+          <p:txBody>
+            <a:bodyPr rtlCol="0" anchor="ctr"/>
+            <a:lstStyle/>
+            <a:p>
+              <a:pPr algn="ctr"/>
+              <a:endParaRPr kumimoji="1" lang="ja-JP" altLang="en-US"/>
+            </a:p>
+          </p:txBody>
+        </p:sp>
+        <p:sp>
+          <p:nvSpPr>
+            <p:cNvPr id="195" name="正方形/長方形 194">
+              <a:extLst>
+                <a:ext uri="{FF2B5EF4-FFF2-40B4-BE49-F238E27FC236}">
+                  <a16:creationId xmlns:a16="http://schemas.microsoft.com/office/drawing/2014/main" id="{A4A54A56-4425-CCC8-F3F4-29C1D2FE0231}"/>
+                </a:ext>
+              </a:extLst>
+            </p:cNvPr>
+            <p:cNvSpPr/>
+            <p:nvPr/>
+          </p:nvSpPr>
+          <p:spPr>
+            <a:xfrm>
+              <a:off x="4213080" y="3827146"/>
+              <a:ext cx="209770" cy="167010"/>
+            </a:xfrm>
+            <a:prstGeom prst="rect">
+              <a:avLst/>
+            </a:prstGeom>
+            <a:solidFill>
+              <a:srgbClr val="D0CECE">
+                <a:alpha val="50196"/>
+              </a:srgbClr>
+            </a:solidFill>
+            <a:ln>
+              <a:noFill/>
+            </a:ln>
+          </p:spPr>
+          <p:style>
+            <a:lnRef idx="2">
+              <a:schemeClr val="accent1">
+                <a:shade val="50000"/>
+              </a:schemeClr>
+            </a:lnRef>
+            <a:fillRef idx="1">
+              <a:schemeClr val="accent1"/>
+            </a:fillRef>
+            <a:effectRef idx="0">
+              <a:schemeClr val="accent1"/>
+            </a:effectRef>
+            <a:fontRef idx="minor">
+              <a:schemeClr val="lt1"/>
+            </a:fontRef>
+          </p:style>
+          <p:txBody>
+            <a:bodyPr rtlCol="0" anchor="ctr"/>
+            <a:lstStyle/>
+            <a:p>
+              <a:pPr algn="ctr"/>
+              <a:endParaRPr kumimoji="1" lang="ja-JP" altLang="en-US"/>
+            </a:p>
+          </p:txBody>
+        </p:sp>
+        <p:sp>
+          <p:nvSpPr>
+            <p:cNvPr id="183" name="正方形/長方形 182">
+              <a:extLst>
+                <a:ext uri="{FF2B5EF4-FFF2-40B4-BE49-F238E27FC236}">
+                  <a16:creationId xmlns:a16="http://schemas.microsoft.com/office/drawing/2014/main" id="{4CA28B8E-6395-4131-9939-837E28B26289}"/>
+                </a:ext>
+              </a:extLst>
+            </p:cNvPr>
+            <p:cNvSpPr/>
+            <p:nvPr/>
+          </p:nvSpPr>
+          <p:spPr>
+            <a:xfrm>
+              <a:off x="4376812" y="4268518"/>
+              <a:ext cx="625477" cy="92075"/>
+            </a:xfrm>
+            <a:prstGeom prst="rect">
+              <a:avLst/>
+            </a:prstGeom>
+            <a:solidFill>
+              <a:schemeClr val="accent2">
+                <a:lumMod val="50000"/>
+              </a:schemeClr>
+            </a:solidFill>
+            <a:ln>
+              <a:noFill/>
+            </a:ln>
+          </p:spPr>
+          <p:style>
+            <a:lnRef idx="2">
+              <a:schemeClr val="accent1">
+                <a:shade val="50000"/>
+              </a:schemeClr>
+            </a:lnRef>
+            <a:fillRef idx="1">
+              <a:schemeClr val="accent1"/>
+            </a:fillRef>
+            <a:effectRef idx="0">
+              <a:schemeClr val="accent1"/>
+            </a:effectRef>
+            <a:fontRef idx="minor">
+              <a:schemeClr val="lt1"/>
+            </a:fontRef>
+          </p:style>
+          <p:txBody>
+            <a:bodyPr rtlCol="0" anchor="ctr"/>
+            <a:lstStyle/>
+            <a:p>
+              <a:pPr algn="ctr"/>
+              <a:endParaRPr kumimoji="1" lang="ja-JP" altLang="en-US"/>
+            </a:p>
+          </p:txBody>
+        </p:sp>
+        <p:sp>
+          <p:nvSpPr>
+            <p:cNvPr id="190" name="正方形/長方形 189">
+              <a:extLst>
+                <a:ext uri="{FF2B5EF4-FFF2-40B4-BE49-F238E27FC236}">
+                  <a16:creationId xmlns:a16="http://schemas.microsoft.com/office/drawing/2014/main" id="{6A6C48F9-27FA-727B-260F-99E89A195BB6}"/>
+                </a:ext>
+              </a:extLst>
+            </p:cNvPr>
+            <p:cNvSpPr/>
+            <p:nvPr/>
+          </p:nvSpPr>
+          <p:spPr>
+            <a:xfrm>
+              <a:off x="4345306" y="2705100"/>
+              <a:ext cx="686458" cy="1168090"/>
+            </a:xfrm>
+            <a:prstGeom prst="rect">
+              <a:avLst/>
+            </a:prstGeom>
+            <a:solidFill>
+              <a:schemeClr val="tx1">
+                <a:lumMod val="85000"/>
+                <a:lumOff val="15000"/>
+              </a:schemeClr>
+            </a:solidFill>
+            <a:ln>
+              <a:noFill/>
+            </a:ln>
+          </p:spPr>
+          <p:style>
+            <a:lnRef idx="2">
+              <a:schemeClr val="accent1">
+                <a:shade val="50000"/>
+              </a:schemeClr>
+            </a:lnRef>
+            <a:fillRef idx="1">
+              <a:schemeClr val="accent1"/>
+            </a:fillRef>
+            <a:effectRef idx="0">
+              <a:schemeClr val="accent1"/>
+            </a:effectRef>
+            <a:fontRef idx="minor">
+              <a:schemeClr val="lt1"/>
+            </a:fontRef>
+          </p:style>
+          <p:txBody>
+            <a:bodyPr rtlCol="0" anchor="ctr"/>
+            <a:lstStyle/>
+            <a:p>
+              <a:pPr algn="ctr"/>
+              <a:endParaRPr kumimoji="1" lang="ja-JP" altLang="en-US"/>
+            </a:p>
+          </p:txBody>
+        </p:sp>
+        <p:sp>
+          <p:nvSpPr>
+            <p:cNvPr id="191" name="正方形/長方形 190">
+              <a:extLst>
+                <a:ext uri="{FF2B5EF4-FFF2-40B4-BE49-F238E27FC236}">
+                  <a16:creationId xmlns:a16="http://schemas.microsoft.com/office/drawing/2014/main" id="{8BD1FF3B-A885-B650-CFAD-5B7E32400EBE}"/>
+                </a:ext>
+              </a:extLst>
+            </p:cNvPr>
+            <p:cNvSpPr/>
+            <p:nvPr/>
+          </p:nvSpPr>
+          <p:spPr>
+            <a:xfrm>
+              <a:off x="4546062" y="4252437"/>
+              <a:ext cx="284939" cy="240625"/>
+            </a:xfrm>
+            <a:prstGeom prst="rect">
+              <a:avLst/>
+            </a:prstGeom>
+            <a:solidFill>
+              <a:schemeClr val="tx1">
+                <a:lumMod val="75000"/>
+                <a:lumOff val="25000"/>
+              </a:schemeClr>
+            </a:solidFill>
+            <a:ln>
+              <a:noFill/>
+            </a:ln>
+          </p:spPr>
+          <p:style>
+            <a:lnRef idx="2">
+              <a:schemeClr val="accent1">
+                <a:shade val="50000"/>
+              </a:schemeClr>
+            </a:lnRef>
+            <a:fillRef idx="1">
+              <a:schemeClr val="accent1"/>
+            </a:fillRef>
+            <a:effectRef idx="0">
+              <a:schemeClr val="accent1"/>
+            </a:effectRef>
+            <a:fontRef idx="minor">
+              <a:schemeClr val="lt1"/>
+            </a:fontRef>
+          </p:style>
+          <p:txBody>
+            <a:bodyPr rtlCol="0" anchor="ctr"/>
+            <a:lstStyle/>
+            <a:p>
+              <a:pPr algn="ctr"/>
+              <a:endParaRPr kumimoji="1" lang="ja-JP" altLang="en-US"/>
+            </a:p>
+          </p:txBody>
+        </p:sp>
+        <p:sp>
+          <p:nvSpPr>
+            <p:cNvPr id="192" name="楕円 191">
+              <a:extLst>
+                <a:ext uri="{FF2B5EF4-FFF2-40B4-BE49-F238E27FC236}">
+                  <a16:creationId xmlns:a16="http://schemas.microsoft.com/office/drawing/2014/main" id="{9B81DDD0-1D45-7ED2-47F6-4C761CB16A8E}"/>
+                </a:ext>
+              </a:extLst>
+            </p:cNvPr>
+            <p:cNvSpPr/>
+            <p:nvPr/>
+          </p:nvSpPr>
+          <p:spPr>
+            <a:xfrm>
+              <a:off x="4954213" y="4312377"/>
+              <a:ext cx="92075" cy="92075"/>
+            </a:xfrm>
+            <a:prstGeom prst="ellipse">
+              <a:avLst/>
+            </a:prstGeom>
+            <a:solidFill>
+              <a:srgbClr val="ED7D31">
+                <a:alpha val="30196"/>
+              </a:srgbClr>
+            </a:solidFill>
+            <a:ln>
+              <a:solidFill>
+                <a:srgbClr val="7F6000">
+                  <a:alpha val="50196"/>
+                </a:srgbClr>
+              </a:solidFill>
+            </a:ln>
+          </p:spPr>
+          <p:style>
+            <a:lnRef idx="2">
+              <a:schemeClr val="accent1">
+                <a:shade val="15000"/>
+              </a:schemeClr>
+            </a:lnRef>
+            <a:fillRef idx="1">
+              <a:schemeClr val="accent1"/>
+            </a:fillRef>
+            <a:effectRef idx="0">
+              <a:schemeClr val="accent1"/>
+            </a:effectRef>
+            <a:fontRef idx="minor">
+              <a:schemeClr val="lt1"/>
+            </a:fontRef>
+          </p:style>
+          <p:txBody>
+            <a:bodyPr rtlCol="0" anchor="ctr"/>
+            <a:lstStyle/>
+            <a:p>
+              <a:pPr algn="ctr"/>
+              <a:endParaRPr kumimoji="1" lang="ja-JP" altLang="en-US"/>
+            </a:p>
+          </p:txBody>
+        </p:sp>
+        <p:sp>
+          <p:nvSpPr>
+            <p:cNvPr id="186" name="四角形: 角を丸くする 185">
+              <a:extLst>
+                <a:ext uri="{FF2B5EF4-FFF2-40B4-BE49-F238E27FC236}">
+                  <a16:creationId xmlns:a16="http://schemas.microsoft.com/office/drawing/2014/main" id="{B80DC28F-2867-B790-C986-3B80B0D2BD07}"/>
+                </a:ext>
+              </a:extLst>
+            </p:cNvPr>
+            <p:cNvSpPr/>
+            <p:nvPr/>
+          </p:nvSpPr>
+          <p:spPr>
+            <a:xfrm>
+              <a:off x="4212282" y="2588062"/>
+              <a:ext cx="952500" cy="1905000"/>
+            </a:xfrm>
+            <a:prstGeom prst="roundRect">
+              <a:avLst>
+                <a:gd name="adj" fmla="val 10000"/>
+              </a:avLst>
+            </a:prstGeom>
+            <a:solidFill>
+              <a:srgbClr val="EA5B24">
+                <a:alpha val="20000"/>
+              </a:srgbClr>
+            </a:solidFill>
+            <a:ln w="28575">
+              <a:solidFill>
+                <a:schemeClr val="accent2">
+                  <a:lumMod val="75000"/>
+                </a:schemeClr>
+              </a:solidFill>
+            </a:ln>
+          </p:spPr>
+          <p:style>
+            <a:lnRef idx="2">
+              <a:schemeClr val="accent1">
+                <a:shade val="50000"/>
+              </a:schemeClr>
+            </a:lnRef>
+            <a:fillRef idx="1">
+              <a:schemeClr val="accent1"/>
+            </a:fillRef>
+            <a:effectRef idx="0">
+              <a:schemeClr val="accent1"/>
+            </a:effectRef>
+            <a:fontRef idx="minor">
+              <a:schemeClr val="lt1"/>
+            </a:fontRef>
+          </p:style>
+          <p:txBody>
+            <a:bodyPr rtlCol="0" anchor="ctr"/>
+            <a:lstStyle/>
+            <a:p>
+              <a:pPr algn="ctr"/>
+              <a:endParaRPr kumimoji="1" lang="ja-JP" altLang="en-US"/>
+            </a:p>
+          </p:txBody>
+        </p:sp>
+        <p:sp>
+          <p:nvSpPr>
+            <p:cNvPr id="184" name="テキスト ボックス 183">
+              <a:extLst>
+                <a:ext uri="{FF2B5EF4-FFF2-40B4-BE49-F238E27FC236}">
+                  <a16:creationId xmlns:a16="http://schemas.microsoft.com/office/drawing/2014/main" id="{71259E72-7E7F-4FA8-D7B9-293DBE80C98E}"/>
+                </a:ext>
+              </a:extLst>
+            </p:cNvPr>
+            <p:cNvSpPr txBox="1"/>
+            <p:nvPr/>
+          </p:nvSpPr>
+          <p:spPr>
+            <a:xfrm>
+              <a:off x="4294679" y="3900294"/>
+              <a:ext cx="787707" cy="477054"/>
+            </a:xfrm>
+            <a:prstGeom prst="rect">
+              <a:avLst/>
+            </a:prstGeom>
+            <a:noFill/>
+          </p:spPr>
+          <p:txBody>
+            <a:bodyPr wrap="square" bIns="0" rtlCol="0">
+              <a:spAutoFit/>
+            </a:bodyPr>
+            <a:lstStyle/>
+            <a:p>
+              <a:pPr algn="ctr"/>
+              <a:r>
+                <a:rPr kumimoji="1" lang="en-US" altLang="ja-JP" sz="2800" dirty="0">
+                  <a:solidFill>
+                    <a:srgbClr val="C34513"/>
+                  </a:solidFill>
+                  <a:latin typeface="メイリオ" panose="020B0604030504040204" pitchFamily="50" charset="-128"/>
+                  <a:ea typeface="メイリオ" panose="020B0604030504040204" pitchFamily="50" charset="-128"/>
+                  <a:cs typeface="Dubai Medium" panose="020B0603030403030204" pitchFamily="34" charset="-78"/>
+                </a:rPr>
+                <a:t>M5</a:t>
+              </a:r>
+              <a:endParaRPr kumimoji="1" lang="ja-JP" altLang="en-US" sz="2800" dirty="0">
+                <a:solidFill>
+                  <a:srgbClr val="C34513"/>
+                </a:solidFill>
+                <a:latin typeface="メイリオ" panose="020B0604030504040204" pitchFamily="50" charset="-128"/>
+                <a:ea typeface="メイリオ" panose="020B0604030504040204" pitchFamily="50" charset="-128"/>
+                <a:cs typeface="Dubai Medium" panose="020B0603030403030204" pitchFamily="34" charset="-78"/>
+              </a:endParaRPr>
+            </a:p>
+          </p:txBody>
+        </p:sp>
+        <p:sp>
+          <p:nvSpPr>
+            <p:cNvPr id="181" name="正方形/長方形 180">
+              <a:extLst>
+                <a:ext uri="{FF2B5EF4-FFF2-40B4-BE49-F238E27FC236}">
+                  <a16:creationId xmlns:a16="http://schemas.microsoft.com/office/drawing/2014/main" id="{E1CF5722-1389-384A-306A-1B0DE8CCD909}"/>
+                </a:ext>
+              </a:extLst>
+            </p:cNvPr>
+            <p:cNvSpPr/>
+            <p:nvPr/>
+          </p:nvSpPr>
+          <p:spPr>
+            <a:xfrm>
+              <a:off x="4374780" y="2723861"/>
+              <a:ext cx="627509" cy="986649"/>
+            </a:xfrm>
+            <a:prstGeom prst="rect">
+              <a:avLst/>
+            </a:prstGeom>
+            <a:solidFill>
+              <a:schemeClr val="tx1">
+                <a:lumMod val="65000"/>
+                <a:lumOff val="35000"/>
+              </a:schemeClr>
+            </a:solidFill>
+            <a:ln>
+              <a:noFill/>
+            </a:ln>
+          </p:spPr>
+          <p:style>
+            <a:lnRef idx="2">
+              <a:schemeClr val="accent1">
+                <a:shade val="50000"/>
+              </a:schemeClr>
+            </a:lnRef>
+            <a:fillRef idx="1">
+              <a:schemeClr val="accent1"/>
+            </a:fillRef>
+            <a:effectRef idx="0">
+              <a:schemeClr val="accent1"/>
+            </a:effectRef>
+            <a:fontRef idx="minor">
+              <a:schemeClr val="lt1"/>
+            </a:fontRef>
+          </p:style>
+          <p:txBody>
+            <a:bodyPr rtlCol="0" anchor="ctr"/>
+            <a:lstStyle/>
+            <a:p>
+              <a:pPr algn="ctr"/>
+              <a:endParaRPr kumimoji="1" lang="ja-JP" altLang="en-US"/>
+            </a:p>
+          </p:txBody>
+        </p:sp>
+        <p:sp>
+          <p:nvSpPr>
+            <p:cNvPr id="185" name="テキスト ボックス 184">
+              <a:extLst>
+                <a:ext uri="{FF2B5EF4-FFF2-40B4-BE49-F238E27FC236}">
+                  <a16:creationId xmlns:a16="http://schemas.microsoft.com/office/drawing/2014/main" id="{8DEFACB7-1D37-74BD-1D81-84124C869851}"/>
+                </a:ext>
+              </a:extLst>
+            </p:cNvPr>
+            <p:cNvSpPr txBox="1"/>
+            <p:nvPr/>
+          </p:nvSpPr>
+          <p:spPr>
+            <a:xfrm>
+              <a:off x="4212285" y="2892340"/>
+              <a:ext cx="952500" cy="646331"/>
+            </a:xfrm>
+            <a:prstGeom prst="rect">
+              <a:avLst/>
+            </a:prstGeom>
+            <a:noFill/>
+          </p:spPr>
+          <p:txBody>
+            <a:bodyPr wrap="square" rtlCol="0">
+              <a:spAutoFit/>
+            </a:bodyPr>
+            <a:lstStyle/>
+            <a:p>
+              <a:pPr algn="ctr"/>
+              <a:r>
+                <a:rPr kumimoji="1" lang="en-US" altLang="ja-JP" sz="1200" b="1">
+                  <a:solidFill>
+                    <a:schemeClr val="bg1"/>
+                  </a:solidFill>
+                  <a:latin typeface="Arial" panose="020B0604020202020204" pitchFamily="34" charset="0"/>
+                  <a:cs typeface="Arial" panose="020B0604020202020204" pitchFamily="34" charset="0"/>
+                </a:rPr>
+                <a:t>StickC Plus</a:t>
+              </a:r>
+              <a:br>
+                <a:rPr kumimoji="1" lang="en-US" altLang="ja-JP" sz="1200" b="1">
+                  <a:solidFill>
+                    <a:schemeClr val="bg1"/>
+                  </a:solidFill>
+                  <a:latin typeface="Arial" panose="020B0604020202020204" pitchFamily="34" charset="0"/>
+                  <a:cs typeface="Arial" panose="020B0604020202020204" pitchFamily="34" charset="0"/>
+                </a:rPr>
+              </a:br>
+              <a:r>
+                <a:rPr kumimoji="1" lang="en-US" altLang="ja-JP" sz="1200" b="1">
+                  <a:solidFill>
+                    <a:schemeClr val="bg1"/>
+                  </a:solidFill>
+                  <a:latin typeface="Arial" panose="020B0604020202020204" pitchFamily="34" charset="0"/>
+                  <a:cs typeface="Arial" panose="020B0604020202020204" pitchFamily="34" charset="0"/>
+                </a:rPr>
+                <a:t>SE</a:t>
+              </a:r>
+              <a:endParaRPr kumimoji="1" lang="ja-JP" altLang="en-US" sz="1200" b="1" dirty="0">
+                <a:solidFill>
+                  <a:schemeClr val="bg1"/>
+                </a:solidFill>
+                <a:latin typeface="Arial" panose="020B0604020202020204" pitchFamily="34" charset="0"/>
+                <a:cs typeface="Arial" panose="020B0604020202020204" pitchFamily="34" charset="0"/>
+              </a:endParaRPr>
+            </a:p>
+          </p:txBody>
+        </p:sp>
+        <p:sp>
+          <p:nvSpPr>
+            <p:cNvPr id="194" name="楕円 193">
+              <a:extLst>
+                <a:ext uri="{FF2B5EF4-FFF2-40B4-BE49-F238E27FC236}">
+                  <a16:creationId xmlns:a16="http://schemas.microsoft.com/office/drawing/2014/main" id="{EA636F28-CDA2-58D9-0059-639AC59A4D2B}"/>
+                </a:ext>
+              </a:extLst>
+            </p:cNvPr>
+            <p:cNvSpPr/>
+            <p:nvPr/>
+          </p:nvSpPr>
+          <p:spPr>
+            <a:xfrm>
+              <a:off x="4330775" y="4312377"/>
+              <a:ext cx="92075" cy="92075"/>
+            </a:xfrm>
+            <a:prstGeom prst="ellipse">
+              <a:avLst/>
+            </a:prstGeom>
+            <a:solidFill>
+              <a:srgbClr val="ED7D31">
+                <a:alpha val="30196"/>
+              </a:srgbClr>
+            </a:solidFill>
+            <a:ln>
+              <a:solidFill>
+                <a:srgbClr val="7F6000">
+                  <a:alpha val="50196"/>
+                </a:srgbClr>
+              </a:solidFill>
+            </a:ln>
+          </p:spPr>
+          <p:style>
+            <a:lnRef idx="2">
+              <a:schemeClr val="accent1">
+                <a:shade val="15000"/>
+              </a:schemeClr>
+            </a:lnRef>
+            <a:fillRef idx="1">
+              <a:schemeClr val="accent1"/>
+            </a:fillRef>
+            <a:effectRef idx="0">
+              <a:schemeClr val="accent1"/>
+            </a:effectRef>
+            <a:fontRef idx="minor">
+              <a:schemeClr val="lt1"/>
+            </a:fontRef>
+          </p:style>
+          <p:txBody>
+            <a:bodyPr rtlCol="0" anchor="ctr"/>
+            <a:lstStyle/>
+            <a:p>
+              <a:pPr algn="ctr"/>
+              <a:endParaRPr kumimoji="1" lang="ja-JP" altLang="en-US"/>
+            </a:p>
+          </p:txBody>
+        </p:sp>
+      </p:grpSp>
     </p:spTree>
     <p:extLst>
       <p:ext uri="{BB962C8B-B14F-4D97-AF65-F5344CB8AC3E}">
